--- a/docs/plots/carbo/jx_carbo_adjcif_anemia3.pptx
+++ b/docs/plots/carbo/jx_carbo_adjcif_anemia3.pptx
@@ -2271,7 +2271,7 @@
           </p:nvSpPr>
           <p:spPr>
             <a:xfrm>
-              <a:off x="972874" y="5081577"/>
+              <a:off x="972874" y="5061297"/>
               <a:ext cx="7644336" cy="0"/>
             </a:xfrm>
             <a:custGeom>
@@ -2314,7 +2314,7 @@
           </p:nvSpPr>
           <p:spPr>
             <a:xfrm>
-              <a:off x="972874" y="4083887"/>
+              <a:off x="972874" y="4023048"/>
               <a:ext cx="7644336" cy="0"/>
             </a:xfrm>
             <a:custGeom>
@@ -2357,7 +2357,7 @@
           </p:nvSpPr>
           <p:spPr>
             <a:xfrm>
-              <a:off x="972874" y="3086197"/>
+              <a:off x="972874" y="2984799"/>
               <a:ext cx="7644336" cy="0"/>
             </a:xfrm>
             <a:custGeom>
@@ -2615,7 +2615,7 @@
           </p:nvSpPr>
           <p:spPr>
             <a:xfrm>
-              <a:off x="972874" y="4582732"/>
+              <a:off x="972874" y="4542173"/>
               <a:ext cx="7644336" cy="0"/>
             </a:xfrm>
             <a:custGeom>
@@ -2658,7 +2658,7 @@
           </p:nvSpPr>
           <p:spPr>
             <a:xfrm>
-              <a:off x="972874" y="3585042"/>
+              <a:off x="972874" y="3503923"/>
               <a:ext cx="7644336" cy="0"/>
             </a:xfrm>
             <a:custGeom>
@@ -2701,21 +2701,21 @@
           </p:nvSpPr>
           <p:spPr>
             <a:xfrm>
-              <a:off x="972874" y="2587352"/>
-              <a:ext cx="7644336" cy="0"/>
+              <a:off x="2313115" y="2583293"/>
+              <a:ext cx="0" cy="3139848"/>
             </a:xfrm>
             <a:custGeom>
               <a:avLst/>
               <a:pathLst>
-                <a:path w="7644336" h="0">
+                <a:path w="0" h="3139848">
                   <a:moveTo>
+                    <a:pt x="0" y="3139848"/>
+                  </a:moveTo>
+                  <a:lnTo>
                     <a:pt x="0" y="0"/>
-                  </a:moveTo>
-                  <a:lnTo>
-                    <a:pt x="7644336" y="0"/>
-                  </a:lnTo>
-                  <a:lnTo>
-                    <a:pt x="7644336" y="0"/>
+                  </a:lnTo>
+                  <a:lnTo>
+                    <a:pt x="0" y="0"/>
                   </a:lnTo>
                 </a:path>
               </a:pathLst>
@@ -2744,7 +2744,7 @@
           </p:nvSpPr>
           <p:spPr>
             <a:xfrm>
-              <a:off x="2313115" y="2583293"/>
+              <a:off x="4298657" y="2583293"/>
               <a:ext cx="0" cy="3139848"/>
             </a:xfrm>
             <a:custGeom>
@@ -2787,7 +2787,7 @@
           </p:nvSpPr>
           <p:spPr>
             <a:xfrm>
-              <a:off x="4298657" y="2583293"/>
+              <a:off x="6284199" y="2583293"/>
               <a:ext cx="0" cy="3139848"/>
             </a:xfrm>
             <a:custGeom>
@@ -2830,7 +2830,7 @@
           </p:nvSpPr>
           <p:spPr>
             <a:xfrm>
-              <a:off x="6284199" y="2583293"/>
+              <a:off x="8269741" y="2583293"/>
               <a:ext cx="0" cy="3139848"/>
             </a:xfrm>
             <a:custGeom>
@@ -2873,28 +2873,76 @@
           </p:nvSpPr>
           <p:spPr>
             <a:xfrm>
-              <a:off x="8269741" y="2583293"/>
-              <a:ext cx="0" cy="3139848"/>
+              <a:off x="1320344" y="3256117"/>
+              <a:ext cx="6949396" cy="2171564"/>
             </a:xfrm>
             <a:custGeom>
               <a:avLst/>
               <a:pathLst>
-                <a:path w="0" h="3139848">
+                <a:path w="6949396" h="2171564">
                   <a:moveTo>
-                    <a:pt x="0" y="3139848"/>
+                    <a:pt x="0" y="2171564"/>
                   </a:moveTo>
                   <a:lnTo>
-                    <a:pt x="0" y="0"/>
-                  </a:lnTo>
-                  <a:lnTo>
-                    <a:pt x="0" y="0"/>
+                    <a:pt x="99277" y="2171564"/>
+                  </a:lnTo>
+                  <a:lnTo>
+                    <a:pt x="99277" y="1723778"/>
+                  </a:lnTo>
+                  <a:lnTo>
+                    <a:pt x="397108" y="1723778"/>
+                  </a:lnTo>
+                  <a:lnTo>
+                    <a:pt x="397108" y="1366190"/>
+                  </a:lnTo>
+                  <a:lnTo>
+                    <a:pt x="1489156" y="1366190"/>
+                  </a:lnTo>
+                  <a:lnTo>
+                    <a:pt x="1489156" y="1189604"/>
+                  </a:lnTo>
+                  <a:lnTo>
+                    <a:pt x="1985541" y="1189604"/>
+                  </a:lnTo>
+                  <a:lnTo>
+                    <a:pt x="1985541" y="1013944"/>
+                  </a:lnTo>
+                  <a:lnTo>
+                    <a:pt x="2283373" y="1013944"/>
+                  </a:lnTo>
+                  <a:lnTo>
+                    <a:pt x="2283373" y="842742"/>
+                  </a:lnTo>
+                  <a:lnTo>
+                    <a:pt x="3176867" y="842742"/>
+                  </a:lnTo>
+                  <a:lnTo>
+                    <a:pt x="3176867" y="488564"/>
+                  </a:lnTo>
+                  <a:lnTo>
+                    <a:pt x="3474698" y="488564"/>
+                  </a:lnTo>
+                  <a:lnTo>
+                    <a:pt x="3474698" y="318992"/>
+                  </a:lnTo>
+                  <a:lnTo>
+                    <a:pt x="6651565" y="318992"/>
+                  </a:lnTo>
+                  <a:lnTo>
+                    <a:pt x="6651565" y="156327"/>
+                  </a:lnTo>
+                  <a:lnTo>
+                    <a:pt x="6949396" y="156327"/>
+                  </a:lnTo>
+                  <a:lnTo>
+                    <a:pt x="6949396" y="0"/>
                   </a:lnTo>
                 </a:path>
               </a:pathLst>
             </a:custGeom>
-            <a:ln w="13550" cap="flat">
+            <a:ln w="27101" cap="flat">
               <a:solidFill>
-                <a:srgbClr val="EBEBEB">
+                <a:srgbClr val="1F78B4">
                   <a:alpha val="100000"/>
                 </a:srgbClr>
               </a:solidFill>
@@ -2916,157 +2964,66 @@
           </p:nvSpPr>
           <p:spPr>
             <a:xfrm>
-              <a:off x="1320344" y="3542789"/>
-              <a:ext cx="6949396" cy="1900664"/>
+              <a:off x="1320344" y="2861938"/>
+              <a:ext cx="6949396" cy="2529898"/>
             </a:xfrm>
             <a:custGeom>
               <a:avLst/>
               <a:pathLst>
-                <a:path w="6949396" h="1900664">
+                <a:path w="6949396" h="2529898">
                   <a:moveTo>
-                    <a:pt x="0" y="1900664"/>
+                    <a:pt x="0" y="2529898"/>
                   </a:moveTo>
                   <a:lnTo>
-                    <a:pt x="99277" y="1900664"/>
-                  </a:lnTo>
-                  <a:lnTo>
-                    <a:pt x="99277" y="1496535"/>
-                  </a:lnTo>
-                  <a:lnTo>
-                    <a:pt x="397108" y="1496535"/>
-                  </a:lnTo>
-                  <a:lnTo>
-                    <a:pt x="397108" y="1194238"/>
-                  </a:lnTo>
-                  <a:lnTo>
-                    <a:pt x="1489156" y="1194238"/>
-                  </a:lnTo>
-                  <a:lnTo>
-                    <a:pt x="1489156" y="1044428"/>
-                  </a:lnTo>
-                  <a:lnTo>
-                    <a:pt x="1985541" y="1044428"/>
-                  </a:lnTo>
-                  <a:lnTo>
-                    <a:pt x="1985541" y="894267"/>
-                  </a:lnTo>
-                  <a:lnTo>
-                    <a:pt x="2283373" y="894267"/>
-                  </a:lnTo>
-                  <a:lnTo>
-                    <a:pt x="2283373" y="745913"/>
-                  </a:lnTo>
-                  <a:lnTo>
-                    <a:pt x="3176867" y="745913"/>
-                  </a:lnTo>
-                  <a:lnTo>
-                    <a:pt x="3176867" y="435819"/>
-                  </a:lnTo>
-                  <a:lnTo>
-                    <a:pt x="3474698" y="435819"/>
-                  </a:lnTo>
-                  <a:lnTo>
-                    <a:pt x="3474698" y="286206"/>
-                  </a:lnTo>
-                  <a:lnTo>
-                    <a:pt x="6651565" y="286206"/>
-                  </a:lnTo>
-                  <a:lnTo>
-                    <a:pt x="6651565" y="140936"/>
-                  </a:lnTo>
-                  <a:lnTo>
-                    <a:pt x="6949396" y="140936"/>
-                  </a:lnTo>
-                  <a:lnTo>
-                    <a:pt x="6949396" y="0"/>
-                  </a:lnTo>
-                </a:path>
-              </a:pathLst>
-            </a:custGeom>
-            <a:ln w="27101" cap="flat">
-              <a:solidFill>
-                <a:srgbClr val="1F78B4">
-                  <a:alpha val="100000"/>
-                </a:srgbClr>
-              </a:solidFill>
-              <a:prstDash val="solid"/>
-              <a:round/>
-            </a:ln>
-          </p:spPr>
-          <p:txBody>
-            <a:bodyPr/>
-            <a:lstStyle/>
-            <a:p/>
-          </p:txBody>
-        </p:sp>
-        <p:sp>
-          <p:nvSpPr>
-            <p:cNvPr id="20" name="pl20"/>
-            <p:cNvSpPr/>
-            <p:nvPr/>
-          </p:nvSpPr>
-          <p:spPr>
-            <a:xfrm>
-              <a:off x="1320344" y="2861938"/>
-              <a:ext cx="6949396" cy="2520350"/>
-            </a:xfrm>
-            <a:custGeom>
-              <a:avLst/>
-              <a:pathLst>
-                <a:path w="6949396" h="2520350">
-                  <a:moveTo>
-                    <a:pt x="0" y="2520350"/>
-                  </a:moveTo>
-                  <a:lnTo>
-                    <a:pt x="99277" y="2520350"/>
-                  </a:lnTo>
-                  <a:lnTo>
-                    <a:pt x="99277" y="1952371"/>
-                  </a:lnTo>
-                  <a:lnTo>
-                    <a:pt x="397108" y="1952371"/>
-                  </a:lnTo>
-                  <a:lnTo>
-                    <a:pt x="397108" y="1541531"/>
-                  </a:lnTo>
-                  <a:lnTo>
-                    <a:pt x="1489156" y="1541531"/>
-                  </a:lnTo>
-                  <a:lnTo>
-                    <a:pt x="1489156" y="1341705"/>
-                  </a:lnTo>
-                  <a:lnTo>
-                    <a:pt x="1985541" y="1341705"/>
-                  </a:lnTo>
-                  <a:lnTo>
-                    <a:pt x="1985541" y="1143629"/>
-                  </a:lnTo>
-                  <a:lnTo>
-                    <a:pt x="2283373" y="1143629"/>
-                  </a:lnTo>
-                  <a:lnTo>
-                    <a:pt x="2283373" y="949925"/>
-                  </a:lnTo>
-                  <a:lnTo>
-                    <a:pt x="3176867" y="949925"/>
-                  </a:lnTo>
-                  <a:lnTo>
-                    <a:pt x="3176867" y="550631"/>
-                  </a:lnTo>
-                  <a:lnTo>
-                    <a:pt x="3474698" y="550631"/>
-                  </a:lnTo>
-                  <a:lnTo>
-                    <a:pt x="3474698" y="360350"/>
-                  </a:lnTo>
-                  <a:lnTo>
-                    <a:pt x="6651565" y="360350"/>
-                  </a:lnTo>
-                  <a:lnTo>
-                    <a:pt x="6651565" y="176885"/>
-                  </a:lnTo>
-                  <a:lnTo>
-                    <a:pt x="6949396" y="176885"/>
+                    <a:pt x="99277" y="2529898"/>
+                  </a:lnTo>
+                  <a:lnTo>
+                    <a:pt x="99277" y="1987412"/>
+                  </a:lnTo>
+                  <a:lnTo>
+                    <a:pt x="397108" y="1987412"/>
+                  </a:lnTo>
+                  <a:lnTo>
+                    <a:pt x="397108" y="1563824"/>
+                  </a:lnTo>
+                  <a:lnTo>
+                    <a:pt x="1489156" y="1563824"/>
+                  </a:lnTo>
+                  <a:lnTo>
+                    <a:pt x="1489156" y="1357315"/>
+                  </a:lnTo>
+                  <a:lnTo>
+                    <a:pt x="1985541" y="1357315"/>
+                  </a:lnTo>
+                  <a:lnTo>
+                    <a:pt x="1985541" y="1153427"/>
+                  </a:lnTo>
+                  <a:lnTo>
+                    <a:pt x="2283373" y="1153427"/>
+                  </a:lnTo>
+                  <a:lnTo>
+                    <a:pt x="2283373" y="956053"/>
+                  </a:lnTo>
+                  <a:lnTo>
+                    <a:pt x="3176867" y="956053"/>
+                  </a:lnTo>
+                  <a:lnTo>
+                    <a:pt x="3176867" y="551413"/>
+                  </a:lnTo>
+                  <a:lnTo>
+                    <a:pt x="3474698" y="551413"/>
+                  </a:lnTo>
+                  <a:lnTo>
+                    <a:pt x="3474698" y="359223"/>
+                  </a:lnTo>
+                  <a:lnTo>
+                    <a:pt x="6651565" y="359223"/>
+                  </a:lnTo>
+                  <a:lnTo>
+                    <a:pt x="6651565" y="175687"/>
+                  </a:lnTo>
+                  <a:lnTo>
+                    <a:pt x="6949396" y="175687"/>
                   </a:lnTo>
                   <a:lnTo>
                     <a:pt x="6949396" y="0"/>
@@ -3092,7 +3049,7 @@
         </p:sp>
         <p:sp>
           <p:nvSpPr>
-            <p:cNvPr id="21" name="tx21"/>
+            <p:cNvPr id="20" name="tx20"/>
             <p:cNvSpPr/>
             <p:nvPr/>
           </p:nvSpPr>
@@ -3138,13 +3095,13 @@
         </p:sp>
         <p:sp>
           <p:nvSpPr>
-            <p:cNvPr id="22" name="tx22"/>
+            <p:cNvPr id="21" name="tx21"/>
             <p:cNvSpPr/>
             <p:nvPr/>
           </p:nvSpPr>
           <p:spPr>
             <a:xfrm>
-              <a:off x="692708" y="4542681"/>
+              <a:off x="692708" y="4502122"/>
               <a:ext cx="217535" cy="80101"/>
             </a:xfrm>
             <a:prstGeom prst="rect">
@@ -3184,13 +3141,13 @@
         </p:sp>
         <p:sp>
           <p:nvSpPr>
-            <p:cNvPr id="23" name="tx23"/>
+            <p:cNvPr id="22" name="tx22"/>
             <p:cNvSpPr/>
             <p:nvPr/>
           </p:nvSpPr>
           <p:spPr>
             <a:xfrm>
-              <a:off x="692708" y="3544991"/>
+              <a:off x="692708" y="3463873"/>
               <a:ext cx="217535" cy="80101"/>
             </a:xfrm>
             <a:prstGeom prst="rect">
@@ -3230,53 +3187,7 @@
         </p:sp>
         <p:sp>
           <p:nvSpPr>
-            <p:cNvPr id="24" name="tx24"/>
-            <p:cNvSpPr/>
-            <p:nvPr/>
-          </p:nvSpPr>
-          <p:spPr>
-            <a:xfrm>
-              <a:off x="692708" y="2547301"/>
-              <a:ext cx="217535" cy="80101"/>
-            </a:xfrm>
-            <a:prstGeom prst="rect">
-              <a:avLst/>
-            </a:prstGeom>
-            <a:noFill/>
-          </p:spPr>
-          <p:txBody>
-            <a:bodyPr lIns="0" rIns="0" tIns="0" bIns="0" anchorCtr="1" anchor="ctr" wrap="none"/>
-            <a:lstStyle/>
-            <a:p>
-              <a:pPr algn="l" marL="0" marR="0" indent="0">
-                <a:lnSpc>
-                  <a:spcPts val="880"/>
-                </a:lnSpc>
-                <a:spcBef>
-                  <a:spcPts val="0"/>
-                </a:spcBef>
-                <a:spcAft>
-                  <a:spcPts val="0"/>
-                </a:spcAft>
-              </a:pPr>
-              <a:r>
-                <a:rPr sz="880">
-                  <a:solidFill>
-                    <a:srgbClr val="4D4D4D">
-                      <a:alpha val="100000"/>
-                    </a:srgbClr>
-                  </a:solidFill>
-                  <a:latin typeface="Helvetica"/>
-                  <a:cs typeface="Helvetica"/>
-                </a:rPr>
-                <a:t>0.15</a:t>
-              </a:r>
-            </a:p>
-          </p:txBody>
-        </p:sp>
-        <p:sp>
-          <p:nvSpPr>
-            <p:cNvPr id="25" name="tx25"/>
+            <p:cNvPr id="23" name="tx23"/>
             <p:cNvSpPr/>
             <p:nvPr/>
           </p:nvSpPr>
@@ -3322,7 +3233,7 @@
         </p:sp>
         <p:sp>
           <p:nvSpPr>
-            <p:cNvPr id="26" name="tx26"/>
+            <p:cNvPr id="24" name="tx24"/>
             <p:cNvSpPr/>
             <p:nvPr/>
           </p:nvSpPr>
@@ -3368,7 +3279,7 @@
         </p:sp>
         <p:sp>
           <p:nvSpPr>
-            <p:cNvPr id="27" name="tx27"/>
+            <p:cNvPr id="25" name="tx25"/>
             <p:cNvSpPr/>
             <p:nvPr/>
           </p:nvSpPr>
@@ -3414,7 +3325,7 @@
         </p:sp>
         <p:sp>
           <p:nvSpPr>
-            <p:cNvPr id="28" name="tx28"/>
+            <p:cNvPr id="26" name="tx26"/>
             <p:cNvSpPr/>
             <p:nvPr/>
           </p:nvSpPr>
@@ -3460,7 +3371,7 @@
         </p:sp>
         <p:sp>
           <p:nvSpPr>
-            <p:cNvPr id="29" name="tx29"/>
+            <p:cNvPr id="27" name="tx27"/>
             <p:cNvSpPr/>
             <p:nvPr/>
           </p:nvSpPr>
@@ -3506,7 +3417,7 @@
         </p:sp>
         <p:sp>
           <p:nvSpPr>
-            <p:cNvPr id="30" name="tx30"/>
+            <p:cNvPr id="28" name="tx28"/>
             <p:cNvSpPr/>
             <p:nvPr/>
           </p:nvSpPr>
@@ -3552,7 +3463,7 @@
         </p:sp>
         <p:sp>
           <p:nvSpPr>
-            <p:cNvPr id="31" name="pl31"/>
+            <p:cNvPr id="29" name="pl29"/>
             <p:cNvSpPr/>
             <p:nvPr/>
           </p:nvSpPr>
@@ -3592,7 +3503,7 @@
         </p:sp>
         <p:sp>
           <p:nvSpPr>
-            <p:cNvPr id="32" name="pl32"/>
+            <p:cNvPr id="30" name="pl30"/>
             <p:cNvSpPr/>
             <p:nvPr/>
           </p:nvSpPr>
@@ -3632,7 +3543,7 @@
         </p:sp>
         <p:sp>
           <p:nvSpPr>
-            <p:cNvPr id="33" name="tx33"/>
+            <p:cNvPr id="31" name="tx31"/>
             <p:cNvSpPr/>
             <p:nvPr/>
           </p:nvSpPr>
@@ -3678,7 +3589,7 @@
         </p:sp>
         <p:sp>
           <p:nvSpPr>
-            <p:cNvPr id="34" name="tx34"/>
+            <p:cNvPr id="32" name="tx32"/>
             <p:cNvSpPr/>
             <p:nvPr/>
           </p:nvSpPr>
@@ -3724,7 +3635,7 @@
         </p:sp>
         <p:sp>
           <p:nvSpPr>
-            <p:cNvPr id="35" name="tx35"/>
+            <p:cNvPr id="33" name="tx33"/>
             <p:cNvSpPr/>
             <p:nvPr/>
           </p:nvSpPr>
@@ -3763,14 +3674,14 @@
                   <a:latin typeface="Helvetica"/>
                   <a:cs typeface="Helvetica"/>
                 </a:rPr>
-                <a:t>Discrep &gt;= +25 vs &lt;+25: subHR = 1.46 (95% CI 0.48-4.41), p = 0.505</a:t>
+                <a:t>Discrep &gt;= +25 vs &lt;+25: subHR = 1.24 (95% CI 0.43-3.54), p = 0.687</a:t>
               </a:r>
             </a:p>
           </p:txBody>
         </p:sp>
         <p:sp>
           <p:nvSpPr>
-            <p:cNvPr id="36" name="tx36"/>
+            <p:cNvPr id="34" name="tx34"/>
             <p:cNvSpPr/>
             <p:nvPr/>
           </p:nvSpPr>

--- a/docs/plots/carbo/jx_carbo_adjcif_anemia3.pptx
+++ b/docs/plots/carbo/jx_carbo_adjcif_anemia3.pptx
@@ -2271,7 +2271,7 @@
           </p:nvSpPr>
           <p:spPr>
             <a:xfrm>
-              <a:off x="972874" y="5061297"/>
+              <a:off x="972874" y="5095966"/>
               <a:ext cx="7644336" cy="0"/>
             </a:xfrm>
             <a:custGeom>
@@ -2314,7 +2314,7 @@
           </p:nvSpPr>
           <p:spPr>
             <a:xfrm>
-              <a:off x="972874" y="4023048"/>
+              <a:off x="972874" y="4127053"/>
               <a:ext cx="7644336" cy="0"/>
             </a:xfrm>
             <a:custGeom>
@@ -2357,7 +2357,7 @@
           </p:nvSpPr>
           <p:spPr>
             <a:xfrm>
-              <a:off x="972874" y="2984799"/>
+              <a:off x="972874" y="3158141"/>
               <a:ext cx="7644336" cy="0"/>
             </a:xfrm>
             <a:custGeom>
@@ -2615,7 +2615,7 @@
           </p:nvSpPr>
           <p:spPr>
             <a:xfrm>
-              <a:off x="972874" y="4542173"/>
+              <a:off x="972874" y="4611509"/>
               <a:ext cx="7644336" cy="0"/>
             </a:xfrm>
             <a:custGeom>
@@ -2658,7 +2658,7 @@
           </p:nvSpPr>
           <p:spPr>
             <a:xfrm>
-              <a:off x="972874" y="3503923"/>
+              <a:off x="972874" y="3642597"/>
               <a:ext cx="7644336" cy="0"/>
             </a:xfrm>
             <a:custGeom>
@@ -2701,21 +2701,21 @@
           </p:nvSpPr>
           <p:spPr>
             <a:xfrm>
-              <a:off x="2313115" y="2583293"/>
-              <a:ext cx="0" cy="3139848"/>
+              <a:off x="972874" y="2673684"/>
+              <a:ext cx="7644336" cy="0"/>
             </a:xfrm>
             <a:custGeom>
               <a:avLst/>
               <a:pathLst>
-                <a:path w="0" h="3139848">
+                <a:path w="7644336" h="0">
                   <a:moveTo>
-                    <a:pt x="0" y="3139848"/>
+                    <a:pt x="0" y="0"/>
                   </a:moveTo>
                   <a:lnTo>
-                    <a:pt x="0" y="0"/>
-                  </a:lnTo>
-                  <a:lnTo>
-                    <a:pt x="0" y="0"/>
+                    <a:pt x="7644336" y="0"/>
+                  </a:lnTo>
+                  <a:lnTo>
+                    <a:pt x="7644336" y="0"/>
                   </a:lnTo>
                 </a:path>
               </a:pathLst>
@@ -2744,7 +2744,7 @@
           </p:nvSpPr>
           <p:spPr>
             <a:xfrm>
-              <a:off x="4298657" y="2583293"/>
+              <a:off x="2313115" y="2583293"/>
               <a:ext cx="0" cy="3139848"/>
             </a:xfrm>
             <a:custGeom>
@@ -2787,7 +2787,7 @@
           </p:nvSpPr>
           <p:spPr>
             <a:xfrm>
-              <a:off x="6284199" y="2583293"/>
+              <a:off x="4298657" y="2583293"/>
               <a:ext cx="0" cy="3139848"/>
             </a:xfrm>
             <a:custGeom>
@@ -2830,7 +2830,7 @@
           </p:nvSpPr>
           <p:spPr>
             <a:xfrm>
-              <a:off x="8269741" y="2583293"/>
+              <a:off x="6284199" y="2583293"/>
               <a:ext cx="0" cy="3139848"/>
             </a:xfrm>
             <a:custGeom>
@@ -2873,66 +2873,109 @@
           </p:nvSpPr>
           <p:spPr>
             <a:xfrm>
-              <a:off x="1320344" y="3256117"/>
-              <a:ext cx="6949396" cy="2171564"/>
+              <a:off x="8269741" y="2583293"/>
+              <a:ext cx="0" cy="3139848"/>
             </a:xfrm>
             <a:custGeom>
               <a:avLst/>
               <a:pathLst>
-                <a:path w="6949396" h="2171564">
+                <a:path w="0" h="3139848">
                   <a:moveTo>
-                    <a:pt x="0" y="2171564"/>
+                    <a:pt x="0" y="3139848"/>
                   </a:moveTo>
                   <a:lnTo>
-                    <a:pt x="99277" y="2171564"/>
-                  </a:lnTo>
-                  <a:lnTo>
-                    <a:pt x="99277" y="1723778"/>
-                  </a:lnTo>
-                  <a:lnTo>
-                    <a:pt x="397108" y="1723778"/>
-                  </a:lnTo>
-                  <a:lnTo>
-                    <a:pt x="397108" y="1366190"/>
-                  </a:lnTo>
-                  <a:lnTo>
-                    <a:pt x="1489156" y="1366190"/>
-                  </a:lnTo>
-                  <a:lnTo>
-                    <a:pt x="1489156" y="1189604"/>
-                  </a:lnTo>
-                  <a:lnTo>
-                    <a:pt x="1985541" y="1189604"/>
-                  </a:lnTo>
-                  <a:lnTo>
-                    <a:pt x="1985541" y="1013944"/>
-                  </a:lnTo>
-                  <a:lnTo>
-                    <a:pt x="2283373" y="1013944"/>
-                  </a:lnTo>
-                  <a:lnTo>
-                    <a:pt x="2283373" y="842742"/>
-                  </a:lnTo>
-                  <a:lnTo>
-                    <a:pt x="3176867" y="842742"/>
-                  </a:lnTo>
-                  <a:lnTo>
-                    <a:pt x="3176867" y="488564"/>
-                  </a:lnTo>
-                  <a:lnTo>
-                    <a:pt x="3474698" y="488564"/>
-                  </a:lnTo>
-                  <a:lnTo>
-                    <a:pt x="3474698" y="318992"/>
-                  </a:lnTo>
-                  <a:lnTo>
-                    <a:pt x="6651565" y="318992"/>
-                  </a:lnTo>
-                  <a:lnTo>
-                    <a:pt x="6651565" y="156327"/>
-                  </a:lnTo>
-                  <a:lnTo>
-                    <a:pt x="6949396" y="156327"/>
+                    <a:pt x="0" y="0"/>
+                  </a:lnTo>
+                  <a:lnTo>
+                    <a:pt x="0" y="0"/>
+                  </a:lnTo>
+                </a:path>
+              </a:pathLst>
+            </a:custGeom>
+            <a:ln w="13550" cap="flat">
+              <a:solidFill>
+                <a:srgbClr val="EBEBEB">
+                  <a:alpha val="100000"/>
+                </a:srgbClr>
+              </a:solidFill>
+              <a:prstDash val="solid"/>
+              <a:round/>
+            </a:ln>
+          </p:spPr>
+          <p:txBody>
+            <a:bodyPr/>
+            <a:lstStyle/>
+            <a:p/>
+          </p:txBody>
+        </p:sp>
+        <p:sp>
+          <p:nvSpPr>
+            <p:cNvPr id="19" name="pl19"/>
+            <p:cNvSpPr/>
+            <p:nvPr/>
+          </p:nvSpPr>
+          <p:spPr>
+            <a:xfrm>
+              <a:off x="1320344" y="3560651"/>
+              <a:ext cx="6949396" cy="1888149"/>
+            </a:xfrm>
+            <a:custGeom>
+              <a:avLst/>
+              <a:pathLst>
+                <a:path w="6949396" h="1888149">
+                  <a:moveTo>
+                    <a:pt x="0" y="1888149"/>
+                  </a:moveTo>
+                  <a:lnTo>
+                    <a:pt x="99277" y="1888149"/>
+                  </a:lnTo>
+                  <a:lnTo>
+                    <a:pt x="99277" y="1505228"/>
+                  </a:lnTo>
+                  <a:lnTo>
+                    <a:pt x="397108" y="1505228"/>
+                  </a:lnTo>
+                  <a:lnTo>
+                    <a:pt x="397108" y="1202817"/>
+                  </a:lnTo>
+                  <a:lnTo>
+                    <a:pt x="1489156" y="1202817"/>
+                  </a:lnTo>
+                  <a:lnTo>
+                    <a:pt x="1489156" y="1051824"/>
+                  </a:lnTo>
+                  <a:lnTo>
+                    <a:pt x="1985541" y="1051824"/>
+                  </a:lnTo>
+                  <a:lnTo>
+                    <a:pt x="1985541" y="899702"/>
+                  </a:lnTo>
+                  <a:lnTo>
+                    <a:pt x="2283373" y="899702"/>
+                  </a:lnTo>
+                  <a:lnTo>
+                    <a:pt x="2283373" y="748861"/>
+                  </a:lnTo>
+                  <a:lnTo>
+                    <a:pt x="3176867" y="748861"/>
+                  </a:lnTo>
+                  <a:lnTo>
+                    <a:pt x="3176867" y="431741"/>
+                  </a:lnTo>
+                  <a:lnTo>
+                    <a:pt x="3474698" y="431741"/>
+                  </a:lnTo>
+                  <a:lnTo>
+                    <a:pt x="3474698" y="281675"/>
+                  </a:lnTo>
+                  <a:lnTo>
+                    <a:pt x="6651565" y="281675"/>
+                  </a:lnTo>
+                  <a:lnTo>
+                    <a:pt x="6651565" y="138068"/>
+                  </a:lnTo>
+                  <a:lnTo>
+                    <a:pt x="6949396" y="138068"/>
                   </a:lnTo>
                   <a:lnTo>
                     <a:pt x="6949396" y="0"/>
@@ -2958,72 +3001,72 @@
         </p:sp>
         <p:sp>
           <p:nvSpPr>
-            <p:cNvPr id="19" name="pl19"/>
+            <p:cNvPr id="20" name="pl20"/>
             <p:cNvSpPr/>
             <p:nvPr/>
           </p:nvSpPr>
           <p:spPr>
             <a:xfrm>
               <a:off x="1320344" y="2861938"/>
-              <a:ext cx="6949396" cy="2529898"/>
+              <a:ext cx="6949396" cy="2520655"/>
             </a:xfrm>
             <a:custGeom>
               <a:avLst/>
               <a:pathLst>
-                <a:path w="6949396" h="2529898">
+                <a:path w="6949396" h="2520655">
                   <a:moveTo>
-                    <a:pt x="0" y="2529898"/>
+                    <a:pt x="0" y="2520655"/>
                   </a:moveTo>
                   <a:lnTo>
-                    <a:pt x="99277" y="2529898"/>
-                  </a:lnTo>
-                  <a:lnTo>
-                    <a:pt x="99277" y="1987412"/>
-                  </a:lnTo>
-                  <a:lnTo>
-                    <a:pt x="397108" y="1987412"/>
-                  </a:lnTo>
-                  <a:lnTo>
-                    <a:pt x="397108" y="1563824"/>
-                  </a:lnTo>
-                  <a:lnTo>
-                    <a:pt x="1489156" y="1563824"/>
-                  </a:lnTo>
-                  <a:lnTo>
-                    <a:pt x="1489156" y="1357315"/>
-                  </a:lnTo>
-                  <a:lnTo>
-                    <a:pt x="1985541" y="1357315"/>
-                  </a:lnTo>
-                  <a:lnTo>
-                    <a:pt x="1985541" y="1153427"/>
-                  </a:lnTo>
-                  <a:lnTo>
-                    <a:pt x="2283373" y="1153427"/>
-                  </a:lnTo>
-                  <a:lnTo>
-                    <a:pt x="2283373" y="956053"/>
-                  </a:lnTo>
-                  <a:lnTo>
-                    <a:pt x="3176867" y="956053"/>
-                  </a:lnTo>
-                  <a:lnTo>
-                    <a:pt x="3176867" y="551413"/>
-                  </a:lnTo>
-                  <a:lnTo>
-                    <a:pt x="3474698" y="551413"/>
-                  </a:lnTo>
-                  <a:lnTo>
-                    <a:pt x="3474698" y="359223"/>
-                  </a:lnTo>
-                  <a:lnTo>
-                    <a:pt x="6651565" y="359223"/>
-                  </a:lnTo>
-                  <a:lnTo>
-                    <a:pt x="6651565" y="175687"/>
-                  </a:lnTo>
-                  <a:lnTo>
-                    <a:pt x="6949396" y="175687"/>
+                    <a:pt x="99277" y="2520655"/>
+                  </a:lnTo>
+                  <a:lnTo>
+                    <a:pt x="99277" y="1969329"/>
+                  </a:lnTo>
+                  <a:lnTo>
+                    <a:pt x="397108" y="1969329"/>
+                  </a:lnTo>
+                  <a:lnTo>
+                    <a:pt x="397108" y="1553949"/>
+                  </a:lnTo>
+                  <a:lnTo>
+                    <a:pt x="1489156" y="1553949"/>
+                  </a:lnTo>
+                  <a:lnTo>
+                    <a:pt x="1489156" y="1351571"/>
+                  </a:lnTo>
+                  <a:lnTo>
+                    <a:pt x="1985541" y="1351571"/>
+                  </a:lnTo>
+                  <a:lnTo>
+                    <a:pt x="1985541" y="1150428"/>
+                  </a:lnTo>
+                  <a:lnTo>
+                    <a:pt x="2283373" y="1150428"/>
+                  </a:lnTo>
+                  <a:lnTo>
+                    <a:pt x="2283373" y="953314"/>
+                  </a:lnTo>
+                  <a:lnTo>
+                    <a:pt x="3176867" y="953314"/>
+                  </a:lnTo>
+                  <a:lnTo>
+                    <a:pt x="3176867" y="545138"/>
+                  </a:lnTo>
+                  <a:lnTo>
+                    <a:pt x="3474698" y="545138"/>
+                  </a:lnTo>
+                  <a:lnTo>
+                    <a:pt x="3474698" y="354435"/>
+                  </a:lnTo>
+                  <a:lnTo>
+                    <a:pt x="6651565" y="354435"/>
+                  </a:lnTo>
+                  <a:lnTo>
+                    <a:pt x="6651565" y="173196"/>
+                  </a:lnTo>
+                  <a:lnTo>
+                    <a:pt x="6949396" y="173196"/>
                   </a:lnTo>
                   <a:lnTo>
                     <a:pt x="6949396" y="0"/>
@@ -3049,7 +3092,7 @@
         </p:sp>
         <p:sp>
           <p:nvSpPr>
-            <p:cNvPr id="20" name="tx20"/>
+            <p:cNvPr id="21" name="tx21"/>
             <p:cNvSpPr/>
             <p:nvPr/>
           </p:nvSpPr>
@@ -3095,13 +3138,13 @@
         </p:sp>
         <p:sp>
           <p:nvSpPr>
-            <p:cNvPr id="21" name="tx21"/>
+            <p:cNvPr id="22" name="tx22"/>
             <p:cNvSpPr/>
             <p:nvPr/>
           </p:nvSpPr>
           <p:spPr>
             <a:xfrm>
-              <a:off x="692708" y="4502122"/>
+              <a:off x="692708" y="4571459"/>
               <a:ext cx="217535" cy="80101"/>
             </a:xfrm>
             <a:prstGeom prst="rect">
@@ -3141,13 +3184,13 @@
         </p:sp>
         <p:sp>
           <p:nvSpPr>
-            <p:cNvPr id="22" name="tx22"/>
+            <p:cNvPr id="23" name="tx23"/>
             <p:cNvSpPr/>
             <p:nvPr/>
           </p:nvSpPr>
           <p:spPr>
             <a:xfrm>
-              <a:off x="692708" y="3463873"/>
+              <a:off x="692708" y="3602546"/>
               <a:ext cx="217535" cy="80101"/>
             </a:xfrm>
             <a:prstGeom prst="rect">
@@ -3187,7 +3230,53 @@
         </p:sp>
         <p:sp>
           <p:nvSpPr>
-            <p:cNvPr id="23" name="tx23"/>
+            <p:cNvPr id="24" name="tx24"/>
+            <p:cNvSpPr/>
+            <p:nvPr/>
+          </p:nvSpPr>
+          <p:spPr>
+            <a:xfrm>
+              <a:off x="692708" y="2633634"/>
+              <a:ext cx="217535" cy="80101"/>
+            </a:xfrm>
+            <a:prstGeom prst="rect">
+              <a:avLst/>
+            </a:prstGeom>
+            <a:noFill/>
+          </p:spPr>
+          <p:txBody>
+            <a:bodyPr lIns="0" rIns="0" tIns="0" bIns="0" anchorCtr="1" anchor="ctr" wrap="none"/>
+            <a:lstStyle/>
+            <a:p>
+              <a:pPr algn="l" marL="0" marR="0" indent="0">
+                <a:lnSpc>
+                  <a:spcPts val="880"/>
+                </a:lnSpc>
+                <a:spcBef>
+                  <a:spcPts val="0"/>
+                </a:spcBef>
+                <a:spcAft>
+                  <a:spcPts val="0"/>
+                </a:spcAft>
+              </a:pPr>
+              <a:r>
+                <a:rPr sz="880">
+                  <a:solidFill>
+                    <a:srgbClr val="4D4D4D">
+                      <a:alpha val="100000"/>
+                    </a:srgbClr>
+                  </a:solidFill>
+                  <a:latin typeface="Helvetica"/>
+                  <a:cs typeface="Helvetica"/>
+                </a:rPr>
+                <a:t>0.15</a:t>
+              </a:r>
+            </a:p>
+          </p:txBody>
+        </p:sp>
+        <p:sp>
+          <p:nvSpPr>
+            <p:cNvPr id="25" name="tx25"/>
             <p:cNvSpPr/>
             <p:nvPr/>
           </p:nvSpPr>
@@ -3233,7 +3322,7 @@
         </p:sp>
         <p:sp>
           <p:nvSpPr>
-            <p:cNvPr id="24" name="tx24"/>
+            <p:cNvPr id="26" name="tx26"/>
             <p:cNvSpPr/>
             <p:nvPr/>
           </p:nvSpPr>
@@ -3279,7 +3368,7 @@
         </p:sp>
         <p:sp>
           <p:nvSpPr>
-            <p:cNvPr id="25" name="tx25"/>
+            <p:cNvPr id="27" name="tx27"/>
             <p:cNvSpPr/>
             <p:nvPr/>
           </p:nvSpPr>
@@ -3325,7 +3414,7 @@
         </p:sp>
         <p:sp>
           <p:nvSpPr>
-            <p:cNvPr id="26" name="tx26"/>
+            <p:cNvPr id="28" name="tx28"/>
             <p:cNvSpPr/>
             <p:nvPr/>
           </p:nvSpPr>
@@ -3371,7 +3460,7 @@
         </p:sp>
         <p:sp>
           <p:nvSpPr>
-            <p:cNvPr id="27" name="tx27"/>
+            <p:cNvPr id="29" name="tx29"/>
             <p:cNvSpPr/>
             <p:nvPr/>
           </p:nvSpPr>
@@ -3417,7 +3506,7 @@
         </p:sp>
         <p:sp>
           <p:nvSpPr>
-            <p:cNvPr id="28" name="tx28"/>
+            <p:cNvPr id="30" name="tx30"/>
             <p:cNvSpPr/>
             <p:nvPr/>
           </p:nvSpPr>
@@ -3463,7 +3552,7 @@
         </p:sp>
         <p:sp>
           <p:nvSpPr>
-            <p:cNvPr id="29" name="pl29"/>
+            <p:cNvPr id="31" name="pl31"/>
             <p:cNvSpPr/>
             <p:nvPr/>
           </p:nvSpPr>
@@ -3503,7 +3592,7 @@
         </p:sp>
         <p:sp>
           <p:nvSpPr>
-            <p:cNvPr id="30" name="pl30"/>
+            <p:cNvPr id="32" name="pl32"/>
             <p:cNvSpPr/>
             <p:nvPr/>
           </p:nvSpPr>
@@ -3543,7 +3632,7 @@
         </p:sp>
         <p:sp>
           <p:nvSpPr>
-            <p:cNvPr id="31" name="tx31"/>
+            <p:cNvPr id="33" name="tx33"/>
             <p:cNvSpPr/>
             <p:nvPr/>
           </p:nvSpPr>
@@ -3589,7 +3678,7 @@
         </p:sp>
         <p:sp>
           <p:nvSpPr>
-            <p:cNvPr id="32" name="tx32"/>
+            <p:cNvPr id="34" name="tx34"/>
             <p:cNvSpPr/>
             <p:nvPr/>
           </p:nvSpPr>
@@ -3635,7 +3724,7 @@
         </p:sp>
         <p:sp>
           <p:nvSpPr>
-            <p:cNvPr id="33" name="tx33"/>
+            <p:cNvPr id="35" name="tx35"/>
             <p:cNvSpPr/>
             <p:nvPr/>
           </p:nvSpPr>
@@ -3674,14 +3763,14 @@
                   <a:latin typeface="Helvetica"/>
                   <a:cs typeface="Helvetica"/>
                 </a:rPr>
-                <a:t>Discrep &gt;= +25 vs &lt;+25: subHR = 1.24 (95% CI 0.43-3.54), p = 0.687</a:t>
+                <a:t>Discrep &gt;= +25 vs &lt;+25: subHR = 1.52 (95% CI 0.56-4.14), p = 0.411</a:t>
               </a:r>
             </a:p>
           </p:txBody>
         </p:sp>
         <p:sp>
           <p:nvSpPr>
-            <p:cNvPr id="34" name="tx34"/>
+            <p:cNvPr id="36" name="tx36"/>
             <p:cNvSpPr/>
             <p:nvPr/>
           </p:nvSpPr>

--- a/docs/plots/carbo/jx_carbo_adjcif_anemia3.pptx
+++ b/docs/plots/carbo/jx_carbo_adjcif_anemia3.pptx
@@ -2271,7 +2271,7 @@
           </p:nvSpPr>
           <p:spPr>
             <a:xfrm>
-              <a:off x="972874" y="5095966"/>
+              <a:off x="972874" y="5061297"/>
               <a:ext cx="7644336" cy="0"/>
             </a:xfrm>
             <a:custGeom>
@@ -2314,7 +2314,7 @@
           </p:nvSpPr>
           <p:spPr>
             <a:xfrm>
-              <a:off x="972874" y="4127053"/>
+              <a:off x="972874" y="4023048"/>
               <a:ext cx="7644336" cy="0"/>
             </a:xfrm>
             <a:custGeom>
@@ -2357,7 +2357,7 @@
           </p:nvSpPr>
           <p:spPr>
             <a:xfrm>
-              <a:off x="972874" y="3158141"/>
+              <a:off x="972874" y="2984799"/>
               <a:ext cx="7644336" cy="0"/>
             </a:xfrm>
             <a:custGeom>
@@ -2615,7 +2615,7 @@
           </p:nvSpPr>
           <p:spPr>
             <a:xfrm>
-              <a:off x="972874" y="4611509"/>
+              <a:off x="972874" y="4542173"/>
               <a:ext cx="7644336" cy="0"/>
             </a:xfrm>
             <a:custGeom>
@@ -2658,7 +2658,7 @@
           </p:nvSpPr>
           <p:spPr>
             <a:xfrm>
-              <a:off x="972874" y="3642597"/>
+              <a:off x="972874" y="3503923"/>
               <a:ext cx="7644336" cy="0"/>
             </a:xfrm>
             <a:custGeom>
@@ -2701,21 +2701,21 @@
           </p:nvSpPr>
           <p:spPr>
             <a:xfrm>
-              <a:off x="972874" y="2673684"/>
-              <a:ext cx="7644336" cy="0"/>
+              <a:off x="2313115" y="2583293"/>
+              <a:ext cx="0" cy="3139848"/>
             </a:xfrm>
             <a:custGeom>
               <a:avLst/>
               <a:pathLst>
-                <a:path w="7644336" h="0">
+                <a:path w="0" h="3139848">
                   <a:moveTo>
+                    <a:pt x="0" y="3139848"/>
+                  </a:moveTo>
+                  <a:lnTo>
                     <a:pt x="0" y="0"/>
-                  </a:moveTo>
-                  <a:lnTo>
-                    <a:pt x="7644336" y="0"/>
-                  </a:lnTo>
-                  <a:lnTo>
-                    <a:pt x="7644336" y="0"/>
+                  </a:lnTo>
+                  <a:lnTo>
+                    <a:pt x="0" y="0"/>
                   </a:lnTo>
                 </a:path>
               </a:pathLst>
@@ -2744,7 +2744,7 @@
           </p:nvSpPr>
           <p:spPr>
             <a:xfrm>
-              <a:off x="2313115" y="2583293"/>
+              <a:off x="4298657" y="2583293"/>
               <a:ext cx="0" cy="3139848"/>
             </a:xfrm>
             <a:custGeom>
@@ -2787,7 +2787,7 @@
           </p:nvSpPr>
           <p:spPr>
             <a:xfrm>
-              <a:off x="4298657" y="2583293"/>
+              <a:off x="6284199" y="2583293"/>
               <a:ext cx="0" cy="3139848"/>
             </a:xfrm>
             <a:custGeom>
@@ -2830,7 +2830,7 @@
           </p:nvSpPr>
           <p:spPr>
             <a:xfrm>
-              <a:off x="6284199" y="2583293"/>
+              <a:off x="8269741" y="2583293"/>
               <a:ext cx="0" cy="3139848"/>
             </a:xfrm>
             <a:custGeom>
@@ -2873,28 +2873,76 @@
           </p:nvSpPr>
           <p:spPr>
             <a:xfrm>
-              <a:off x="8269741" y="2583293"/>
-              <a:ext cx="0" cy="3139848"/>
+              <a:off x="1320344" y="3256117"/>
+              <a:ext cx="6949396" cy="2171564"/>
             </a:xfrm>
             <a:custGeom>
               <a:avLst/>
               <a:pathLst>
-                <a:path w="0" h="3139848">
+                <a:path w="6949396" h="2171564">
                   <a:moveTo>
-                    <a:pt x="0" y="3139848"/>
+                    <a:pt x="0" y="2171564"/>
                   </a:moveTo>
                   <a:lnTo>
-                    <a:pt x="0" y="0"/>
-                  </a:lnTo>
-                  <a:lnTo>
-                    <a:pt x="0" y="0"/>
+                    <a:pt x="99277" y="2171564"/>
+                  </a:lnTo>
+                  <a:lnTo>
+                    <a:pt x="99277" y="1723778"/>
+                  </a:lnTo>
+                  <a:lnTo>
+                    <a:pt x="397108" y="1723778"/>
+                  </a:lnTo>
+                  <a:lnTo>
+                    <a:pt x="397108" y="1366190"/>
+                  </a:lnTo>
+                  <a:lnTo>
+                    <a:pt x="1489156" y="1366190"/>
+                  </a:lnTo>
+                  <a:lnTo>
+                    <a:pt x="1489156" y="1189604"/>
+                  </a:lnTo>
+                  <a:lnTo>
+                    <a:pt x="1985541" y="1189604"/>
+                  </a:lnTo>
+                  <a:lnTo>
+                    <a:pt x="1985541" y="1013944"/>
+                  </a:lnTo>
+                  <a:lnTo>
+                    <a:pt x="2283373" y="1013944"/>
+                  </a:lnTo>
+                  <a:lnTo>
+                    <a:pt x="2283373" y="842742"/>
+                  </a:lnTo>
+                  <a:lnTo>
+                    <a:pt x="3176867" y="842742"/>
+                  </a:lnTo>
+                  <a:lnTo>
+                    <a:pt x="3176867" y="488564"/>
+                  </a:lnTo>
+                  <a:lnTo>
+                    <a:pt x="3474698" y="488564"/>
+                  </a:lnTo>
+                  <a:lnTo>
+                    <a:pt x="3474698" y="318992"/>
+                  </a:lnTo>
+                  <a:lnTo>
+                    <a:pt x="6651565" y="318992"/>
+                  </a:lnTo>
+                  <a:lnTo>
+                    <a:pt x="6651565" y="156327"/>
+                  </a:lnTo>
+                  <a:lnTo>
+                    <a:pt x="6949396" y="156327"/>
+                  </a:lnTo>
+                  <a:lnTo>
+                    <a:pt x="6949396" y="0"/>
                   </a:lnTo>
                 </a:path>
               </a:pathLst>
             </a:custGeom>
-            <a:ln w="13550" cap="flat">
+            <a:ln w="27101" cap="flat">
               <a:solidFill>
-                <a:srgbClr val="EBEBEB">
+                <a:srgbClr val="1F78B4">
                   <a:alpha val="100000"/>
                 </a:srgbClr>
               </a:solidFill>
@@ -2916,157 +2964,66 @@
           </p:nvSpPr>
           <p:spPr>
             <a:xfrm>
-              <a:off x="1320344" y="3560651"/>
-              <a:ext cx="6949396" cy="1888149"/>
+              <a:off x="1320344" y="2861938"/>
+              <a:ext cx="6949396" cy="2529898"/>
             </a:xfrm>
             <a:custGeom>
               <a:avLst/>
               <a:pathLst>
-                <a:path w="6949396" h="1888149">
+                <a:path w="6949396" h="2529898">
                   <a:moveTo>
-                    <a:pt x="0" y="1888149"/>
+                    <a:pt x="0" y="2529898"/>
                   </a:moveTo>
                   <a:lnTo>
-                    <a:pt x="99277" y="1888149"/>
-                  </a:lnTo>
-                  <a:lnTo>
-                    <a:pt x="99277" y="1505228"/>
-                  </a:lnTo>
-                  <a:lnTo>
-                    <a:pt x="397108" y="1505228"/>
-                  </a:lnTo>
-                  <a:lnTo>
-                    <a:pt x="397108" y="1202817"/>
-                  </a:lnTo>
-                  <a:lnTo>
-                    <a:pt x="1489156" y="1202817"/>
-                  </a:lnTo>
-                  <a:lnTo>
-                    <a:pt x="1489156" y="1051824"/>
-                  </a:lnTo>
-                  <a:lnTo>
-                    <a:pt x="1985541" y="1051824"/>
-                  </a:lnTo>
-                  <a:lnTo>
-                    <a:pt x="1985541" y="899702"/>
-                  </a:lnTo>
-                  <a:lnTo>
-                    <a:pt x="2283373" y="899702"/>
-                  </a:lnTo>
-                  <a:lnTo>
-                    <a:pt x="2283373" y="748861"/>
-                  </a:lnTo>
-                  <a:lnTo>
-                    <a:pt x="3176867" y="748861"/>
-                  </a:lnTo>
-                  <a:lnTo>
-                    <a:pt x="3176867" y="431741"/>
-                  </a:lnTo>
-                  <a:lnTo>
-                    <a:pt x="3474698" y="431741"/>
-                  </a:lnTo>
-                  <a:lnTo>
-                    <a:pt x="3474698" y="281675"/>
-                  </a:lnTo>
-                  <a:lnTo>
-                    <a:pt x="6651565" y="281675"/>
-                  </a:lnTo>
-                  <a:lnTo>
-                    <a:pt x="6651565" y="138068"/>
-                  </a:lnTo>
-                  <a:lnTo>
-                    <a:pt x="6949396" y="138068"/>
-                  </a:lnTo>
-                  <a:lnTo>
-                    <a:pt x="6949396" y="0"/>
-                  </a:lnTo>
-                </a:path>
-              </a:pathLst>
-            </a:custGeom>
-            <a:ln w="27101" cap="flat">
-              <a:solidFill>
-                <a:srgbClr val="1F78B4">
-                  <a:alpha val="100000"/>
-                </a:srgbClr>
-              </a:solidFill>
-              <a:prstDash val="solid"/>
-              <a:round/>
-            </a:ln>
-          </p:spPr>
-          <p:txBody>
-            <a:bodyPr/>
-            <a:lstStyle/>
-            <a:p/>
-          </p:txBody>
-        </p:sp>
-        <p:sp>
-          <p:nvSpPr>
-            <p:cNvPr id="20" name="pl20"/>
-            <p:cNvSpPr/>
-            <p:nvPr/>
-          </p:nvSpPr>
-          <p:spPr>
-            <a:xfrm>
-              <a:off x="1320344" y="2861938"/>
-              <a:ext cx="6949396" cy="2520655"/>
-            </a:xfrm>
-            <a:custGeom>
-              <a:avLst/>
-              <a:pathLst>
-                <a:path w="6949396" h="2520655">
-                  <a:moveTo>
-                    <a:pt x="0" y="2520655"/>
-                  </a:moveTo>
-                  <a:lnTo>
-                    <a:pt x="99277" y="2520655"/>
-                  </a:lnTo>
-                  <a:lnTo>
-                    <a:pt x="99277" y="1969329"/>
-                  </a:lnTo>
-                  <a:lnTo>
-                    <a:pt x="397108" y="1969329"/>
-                  </a:lnTo>
-                  <a:lnTo>
-                    <a:pt x="397108" y="1553949"/>
-                  </a:lnTo>
-                  <a:lnTo>
-                    <a:pt x="1489156" y="1553949"/>
-                  </a:lnTo>
-                  <a:lnTo>
-                    <a:pt x="1489156" y="1351571"/>
-                  </a:lnTo>
-                  <a:lnTo>
-                    <a:pt x="1985541" y="1351571"/>
-                  </a:lnTo>
-                  <a:lnTo>
-                    <a:pt x="1985541" y="1150428"/>
-                  </a:lnTo>
-                  <a:lnTo>
-                    <a:pt x="2283373" y="1150428"/>
-                  </a:lnTo>
-                  <a:lnTo>
-                    <a:pt x="2283373" y="953314"/>
-                  </a:lnTo>
-                  <a:lnTo>
-                    <a:pt x="3176867" y="953314"/>
-                  </a:lnTo>
-                  <a:lnTo>
-                    <a:pt x="3176867" y="545138"/>
-                  </a:lnTo>
-                  <a:lnTo>
-                    <a:pt x="3474698" y="545138"/>
-                  </a:lnTo>
-                  <a:lnTo>
-                    <a:pt x="3474698" y="354435"/>
-                  </a:lnTo>
-                  <a:lnTo>
-                    <a:pt x="6651565" y="354435"/>
-                  </a:lnTo>
-                  <a:lnTo>
-                    <a:pt x="6651565" y="173196"/>
-                  </a:lnTo>
-                  <a:lnTo>
-                    <a:pt x="6949396" y="173196"/>
+                    <a:pt x="99277" y="2529898"/>
+                  </a:lnTo>
+                  <a:lnTo>
+                    <a:pt x="99277" y="1987412"/>
+                  </a:lnTo>
+                  <a:lnTo>
+                    <a:pt x="397108" y="1987412"/>
+                  </a:lnTo>
+                  <a:lnTo>
+                    <a:pt x="397108" y="1563824"/>
+                  </a:lnTo>
+                  <a:lnTo>
+                    <a:pt x="1489156" y="1563824"/>
+                  </a:lnTo>
+                  <a:lnTo>
+                    <a:pt x="1489156" y="1357315"/>
+                  </a:lnTo>
+                  <a:lnTo>
+                    <a:pt x="1985541" y="1357315"/>
+                  </a:lnTo>
+                  <a:lnTo>
+                    <a:pt x="1985541" y="1153427"/>
+                  </a:lnTo>
+                  <a:lnTo>
+                    <a:pt x="2283373" y="1153427"/>
+                  </a:lnTo>
+                  <a:lnTo>
+                    <a:pt x="2283373" y="956053"/>
+                  </a:lnTo>
+                  <a:lnTo>
+                    <a:pt x="3176867" y="956053"/>
+                  </a:lnTo>
+                  <a:lnTo>
+                    <a:pt x="3176867" y="551413"/>
+                  </a:lnTo>
+                  <a:lnTo>
+                    <a:pt x="3474698" y="551413"/>
+                  </a:lnTo>
+                  <a:lnTo>
+                    <a:pt x="3474698" y="359223"/>
+                  </a:lnTo>
+                  <a:lnTo>
+                    <a:pt x="6651565" y="359223"/>
+                  </a:lnTo>
+                  <a:lnTo>
+                    <a:pt x="6651565" y="175687"/>
+                  </a:lnTo>
+                  <a:lnTo>
+                    <a:pt x="6949396" y="175687"/>
                   </a:lnTo>
                   <a:lnTo>
                     <a:pt x="6949396" y="0"/>
@@ -3092,7 +3049,7 @@
         </p:sp>
         <p:sp>
           <p:nvSpPr>
-            <p:cNvPr id="21" name="tx21"/>
+            <p:cNvPr id="20" name="tx20"/>
             <p:cNvSpPr/>
             <p:nvPr/>
           </p:nvSpPr>
@@ -3138,13 +3095,13 @@
         </p:sp>
         <p:sp>
           <p:nvSpPr>
-            <p:cNvPr id="22" name="tx22"/>
+            <p:cNvPr id="21" name="tx21"/>
             <p:cNvSpPr/>
             <p:nvPr/>
           </p:nvSpPr>
           <p:spPr>
             <a:xfrm>
-              <a:off x="692708" y="4571459"/>
+              <a:off x="692708" y="4502122"/>
               <a:ext cx="217535" cy="80101"/>
             </a:xfrm>
             <a:prstGeom prst="rect">
@@ -3184,13 +3141,13 @@
         </p:sp>
         <p:sp>
           <p:nvSpPr>
-            <p:cNvPr id="23" name="tx23"/>
+            <p:cNvPr id="22" name="tx22"/>
             <p:cNvSpPr/>
             <p:nvPr/>
           </p:nvSpPr>
           <p:spPr>
             <a:xfrm>
-              <a:off x="692708" y="3602546"/>
+              <a:off x="692708" y="3463873"/>
               <a:ext cx="217535" cy="80101"/>
             </a:xfrm>
             <a:prstGeom prst="rect">
@@ -3230,53 +3187,7 @@
         </p:sp>
         <p:sp>
           <p:nvSpPr>
-            <p:cNvPr id="24" name="tx24"/>
-            <p:cNvSpPr/>
-            <p:nvPr/>
-          </p:nvSpPr>
-          <p:spPr>
-            <a:xfrm>
-              <a:off x="692708" y="2633634"/>
-              <a:ext cx="217535" cy="80101"/>
-            </a:xfrm>
-            <a:prstGeom prst="rect">
-              <a:avLst/>
-            </a:prstGeom>
-            <a:noFill/>
-          </p:spPr>
-          <p:txBody>
-            <a:bodyPr lIns="0" rIns="0" tIns="0" bIns="0" anchorCtr="1" anchor="ctr" wrap="none"/>
-            <a:lstStyle/>
-            <a:p>
-              <a:pPr algn="l" marL="0" marR="0" indent="0">
-                <a:lnSpc>
-                  <a:spcPts val="880"/>
-                </a:lnSpc>
-                <a:spcBef>
-                  <a:spcPts val="0"/>
-                </a:spcBef>
-                <a:spcAft>
-                  <a:spcPts val="0"/>
-                </a:spcAft>
-              </a:pPr>
-              <a:r>
-                <a:rPr sz="880">
-                  <a:solidFill>
-                    <a:srgbClr val="4D4D4D">
-                      <a:alpha val="100000"/>
-                    </a:srgbClr>
-                  </a:solidFill>
-                  <a:latin typeface="Helvetica"/>
-                  <a:cs typeface="Helvetica"/>
-                </a:rPr>
-                <a:t>0.15</a:t>
-              </a:r>
-            </a:p>
-          </p:txBody>
-        </p:sp>
-        <p:sp>
-          <p:nvSpPr>
-            <p:cNvPr id="25" name="tx25"/>
+            <p:cNvPr id="23" name="tx23"/>
             <p:cNvSpPr/>
             <p:nvPr/>
           </p:nvSpPr>
@@ -3322,7 +3233,7 @@
         </p:sp>
         <p:sp>
           <p:nvSpPr>
-            <p:cNvPr id="26" name="tx26"/>
+            <p:cNvPr id="24" name="tx24"/>
             <p:cNvSpPr/>
             <p:nvPr/>
           </p:nvSpPr>
@@ -3368,7 +3279,7 @@
         </p:sp>
         <p:sp>
           <p:nvSpPr>
-            <p:cNvPr id="27" name="tx27"/>
+            <p:cNvPr id="25" name="tx25"/>
             <p:cNvSpPr/>
             <p:nvPr/>
           </p:nvSpPr>
@@ -3414,7 +3325,7 @@
         </p:sp>
         <p:sp>
           <p:nvSpPr>
-            <p:cNvPr id="28" name="tx28"/>
+            <p:cNvPr id="26" name="tx26"/>
             <p:cNvSpPr/>
             <p:nvPr/>
           </p:nvSpPr>
@@ -3460,7 +3371,7 @@
         </p:sp>
         <p:sp>
           <p:nvSpPr>
-            <p:cNvPr id="29" name="tx29"/>
+            <p:cNvPr id="27" name="tx27"/>
             <p:cNvSpPr/>
             <p:nvPr/>
           </p:nvSpPr>
@@ -3506,7 +3417,7 @@
         </p:sp>
         <p:sp>
           <p:nvSpPr>
-            <p:cNvPr id="30" name="tx30"/>
+            <p:cNvPr id="28" name="tx28"/>
             <p:cNvSpPr/>
             <p:nvPr/>
           </p:nvSpPr>
@@ -3552,7 +3463,7 @@
         </p:sp>
         <p:sp>
           <p:nvSpPr>
-            <p:cNvPr id="31" name="pl31"/>
+            <p:cNvPr id="29" name="pl29"/>
             <p:cNvSpPr/>
             <p:nvPr/>
           </p:nvSpPr>
@@ -3592,7 +3503,7 @@
         </p:sp>
         <p:sp>
           <p:nvSpPr>
-            <p:cNvPr id="32" name="pl32"/>
+            <p:cNvPr id="30" name="pl30"/>
             <p:cNvSpPr/>
             <p:nvPr/>
           </p:nvSpPr>
@@ -3632,7 +3543,7 @@
         </p:sp>
         <p:sp>
           <p:nvSpPr>
-            <p:cNvPr id="33" name="tx33"/>
+            <p:cNvPr id="31" name="tx31"/>
             <p:cNvSpPr/>
             <p:nvPr/>
           </p:nvSpPr>
@@ -3678,7 +3589,7 @@
         </p:sp>
         <p:sp>
           <p:nvSpPr>
-            <p:cNvPr id="34" name="tx34"/>
+            <p:cNvPr id="32" name="tx32"/>
             <p:cNvSpPr/>
             <p:nvPr/>
           </p:nvSpPr>
@@ -3724,7 +3635,7 @@
         </p:sp>
         <p:sp>
           <p:nvSpPr>
-            <p:cNvPr id="35" name="tx35"/>
+            <p:cNvPr id="33" name="tx33"/>
             <p:cNvSpPr/>
             <p:nvPr/>
           </p:nvSpPr>
@@ -3763,14 +3674,14 @@
                   <a:latin typeface="Helvetica"/>
                   <a:cs typeface="Helvetica"/>
                 </a:rPr>
-                <a:t>Discrep &gt;= +25 vs &lt;+25: subHR = 1.52 (95% CI 0.56-4.14), p = 0.411</a:t>
+                <a:t>Discrep &gt;= +25 vs &lt;+25: subHR = 1.24 (95% CI 0.43-3.54), p = 0.687</a:t>
               </a:r>
             </a:p>
           </p:txBody>
         </p:sp>
         <p:sp>
           <p:nvSpPr>
-            <p:cNvPr id="36" name="tx36"/>
+            <p:cNvPr id="34" name="tx34"/>
             <p:cNvSpPr/>
             <p:nvPr/>
           </p:nvSpPr>

--- a/docs/plots/carbo/jx_carbo_adjcif_anemia3.pptx
+++ b/docs/plots/carbo/jx_carbo_adjcif_anemia3.pptx
@@ -2271,26 +2271,26 @@
           </p:nvSpPr>
           <p:spPr>
             <a:xfrm>
-              <a:off x="972874" y="5061297"/>
-              <a:ext cx="7644336" cy="0"/>
+              <a:off x="1113155" y="5016691"/>
+              <a:ext cx="7485076" cy="0"/>
             </a:xfrm>
             <a:custGeom>
               <a:avLst/>
               <a:pathLst>
-                <a:path w="7644336" h="0">
+                <a:path w="7485076" h="0">
                   <a:moveTo>
                     <a:pt x="0" y="0"/>
                   </a:moveTo>
                   <a:lnTo>
-                    <a:pt x="7644336" y="0"/>
-                  </a:lnTo>
-                  <a:lnTo>
-                    <a:pt x="7644336" y="0"/>
+                    <a:pt x="7485076" y="0"/>
+                  </a:lnTo>
+                  <a:lnTo>
+                    <a:pt x="7485076" y="0"/>
                   </a:lnTo>
                 </a:path>
               </a:pathLst>
             </a:custGeom>
-            <a:ln w="6775" cap="flat">
+            <a:ln w="8623" cap="flat">
               <a:solidFill>
                 <a:srgbClr val="EBEBEB">
                   <a:alpha val="100000"/>
@@ -2314,26 +2314,26 @@
           </p:nvSpPr>
           <p:spPr>
             <a:xfrm>
-              <a:off x="972874" y="4023048"/>
-              <a:ext cx="7644336" cy="0"/>
+              <a:off x="1113155" y="4080762"/>
+              <a:ext cx="7485076" cy="0"/>
             </a:xfrm>
             <a:custGeom>
               <a:avLst/>
               <a:pathLst>
-                <a:path w="7644336" h="0">
+                <a:path w="7485076" h="0">
                   <a:moveTo>
                     <a:pt x="0" y="0"/>
                   </a:moveTo>
                   <a:lnTo>
-                    <a:pt x="7644336" y="0"/>
-                  </a:lnTo>
-                  <a:lnTo>
-                    <a:pt x="7644336" y="0"/>
+                    <a:pt x="7485076" y="0"/>
+                  </a:lnTo>
+                  <a:lnTo>
+                    <a:pt x="7485076" y="0"/>
                   </a:lnTo>
                 </a:path>
               </a:pathLst>
             </a:custGeom>
-            <a:ln w="6775" cap="flat">
+            <a:ln w="8623" cap="flat">
               <a:solidFill>
                 <a:srgbClr val="EBEBEB">
                   <a:alpha val="100000"/>
@@ -2357,26 +2357,26 @@
           </p:nvSpPr>
           <p:spPr>
             <a:xfrm>
-              <a:off x="972874" y="2984799"/>
-              <a:ext cx="7644336" cy="0"/>
+              <a:off x="1113155" y="3144833"/>
+              <a:ext cx="7485076" cy="0"/>
             </a:xfrm>
             <a:custGeom>
               <a:avLst/>
               <a:pathLst>
-                <a:path w="7644336" h="0">
+                <a:path w="7485076" h="0">
                   <a:moveTo>
                     <a:pt x="0" y="0"/>
                   </a:moveTo>
                   <a:lnTo>
-                    <a:pt x="7644336" y="0"/>
-                  </a:lnTo>
-                  <a:lnTo>
-                    <a:pt x="7644336" y="0"/>
+                    <a:pt x="7485076" y="0"/>
+                  </a:lnTo>
+                  <a:lnTo>
+                    <a:pt x="7485076" y="0"/>
                   </a:lnTo>
                 </a:path>
               </a:pathLst>
             </a:custGeom>
-            <a:ln w="6775" cap="flat">
+            <a:ln w="8623" cap="flat">
               <a:solidFill>
                 <a:srgbClr val="EBEBEB">
                   <a:alpha val="100000"/>
@@ -2400,15 +2400,15 @@
           </p:nvSpPr>
           <p:spPr>
             <a:xfrm>
-              <a:off x="1320344" y="2583293"/>
-              <a:ext cx="0" cy="3139848"/>
+              <a:off x="1453386" y="2782896"/>
+              <a:ext cx="0" cy="2830414"/>
             </a:xfrm>
             <a:custGeom>
               <a:avLst/>
               <a:pathLst>
-                <a:path w="0" h="3139848">
+                <a:path w="0" h="2830414">
                   <a:moveTo>
-                    <a:pt x="0" y="3139848"/>
+                    <a:pt x="0" y="2830414"/>
                   </a:moveTo>
                   <a:lnTo>
                     <a:pt x="0" y="0"/>
@@ -2419,7 +2419,7 @@
                 </a:path>
               </a:pathLst>
             </a:custGeom>
-            <a:ln w="6775" cap="flat">
+            <a:ln w="8623" cap="flat">
               <a:solidFill>
                 <a:srgbClr val="EBEBEB">
                   <a:alpha val="100000"/>
@@ -2443,15 +2443,15 @@
           </p:nvSpPr>
           <p:spPr>
             <a:xfrm>
-              <a:off x="3305886" y="2583293"/>
-              <a:ext cx="0" cy="3139848"/>
+              <a:off x="3397561" y="2782896"/>
+              <a:ext cx="0" cy="2830414"/>
             </a:xfrm>
             <a:custGeom>
               <a:avLst/>
               <a:pathLst>
-                <a:path w="0" h="3139848">
+                <a:path w="0" h="2830414">
                   <a:moveTo>
-                    <a:pt x="0" y="3139848"/>
+                    <a:pt x="0" y="2830414"/>
                   </a:moveTo>
                   <a:lnTo>
                     <a:pt x="0" y="0"/>
@@ -2462,7 +2462,7 @@
                 </a:path>
               </a:pathLst>
             </a:custGeom>
-            <a:ln w="6775" cap="flat">
+            <a:ln w="8623" cap="flat">
               <a:solidFill>
                 <a:srgbClr val="EBEBEB">
                   <a:alpha val="100000"/>
@@ -2486,15 +2486,15 @@
           </p:nvSpPr>
           <p:spPr>
             <a:xfrm>
-              <a:off x="5291428" y="2583293"/>
-              <a:ext cx="0" cy="3139848"/>
+              <a:off x="5341737" y="2782896"/>
+              <a:ext cx="0" cy="2830414"/>
             </a:xfrm>
             <a:custGeom>
               <a:avLst/>
               <a:pathLst>
-                <a:path w="0" h="3139848">
+                <a:path w="0" h="2830414">
                   <a:moveTo>
-                    <a:pt x="0" y="3139848"/>
+                    <a:pt x="0" y="2830414"/>
                   </a:moveTo>
                   <a:lnTo>
                     <a:pt x="0" y="0"/>
@@ -2505,7 +2505,7 @@
                 </a:path>
               </a:pathLst>
             </a:custGeom>
-            <a:ln w="6775" cap="flat">
+            <a:ln w="8623" cap="flat">
               <a:solidFill>
                 <a:srgbClr val="EBEBEB">
                   <a:alpha val="100000"/>
@@ -2529,15 +2529,15 @@
           </p:nvSpPr>
           <p:spPr>
             <a:xfrm>
-              <a:off x="7276970" y="2583293"/>
-              <a:ext cx="0" cy="3139848"/>
+              <a:off x="7285913" y="2782896"/>
+              <a:ext cx="0" cy="2830414"/>
             </a:xfrm>
             <a:custGeom>
               <a:avLst/>
               <a:pathLst>
-                <a:path w="0" h="3139848">
+                <a:path w="0" h="2830414">
                   <a:moveTo>
-                    <a:pt x="0" y="3139848"/>
+                    <a:pt x="0" y="2830414"/>
                   </a:moveTo>
                   <a:lnTo>
                     <a:pt x="0" y="0"/>
@@ -2548,7 +2548,7 @@
                 </a:path>
               </a:pathLst>
             </a:custGeom>
-            <a:ln w="6775" cap="flat">
+            <a:ln w="8623" cap="flat">
               <a:solidFill>
                 <a:srgbClr val="EBEBEB">
                   <a:alpha val="100000"/>
@@ -2572,26 +2572,26 @@
           </p:nvSpPr>
           <p:spPr>
             <a:xfrm>
-              <a:off x="972874" y="5580422"/>
-              <a:ext cx="7644336" cy="0"/>
+              <a:off x="1113155" y="5484655"/>
+              <a:ext cx="7485076" cy="0"/>
             </a:xfrm>
             <a:custGeom>
               <a:avLst/>
               <a:pathLst>
-                <a:path w="7644336" h="0">
+                <a:path w="7485076" h="0">
                   <a:moveTo>
                     <a:pt x="0" y="0"/>
                   </a:moveTo>
                   <a:lnTo>
-                    <a:pt x="7644336" y="0"/>
-                  </a:lnTo>
-                  <a:lnTo>
-                    <a:pt x="7644336" y="0"/>
+                    <a:pt x="7485076" y="0"/>
+                  </a:lnTo>
+                  <a:lnTo>
+                    <a:pt x="7485076" y="0"/>
                   </a:lnTo>
                 </a:path>
               </a:pathLst>
             </a:custGeom>
-            <a:ln w="13550" cap="flat">
+            <a:ln w="17246" cap="flat">
               <a:solidFill>
                 <a:srgbClr val="EBEBEB">
                   <a:alpha val="100000"/>
@@ -2615,26 +2615,26 @@
           </p:nvSpPr>
           <p:spPr>
             <a:xfrm>
-              <a:off x="972874" y="4542173"/>
-              <a:ext cx="7644336" cy="0"/>
+              <a:off x="1113155" y="4548726"/>
+              <a:ext cx="7485076" cy="0"/>
             </a:xfrm>
             <a:custGeom>
               <a:avLst/>
               <a:pathLst>
-                <a:path w="7644336" h="0">
+                <a:path w="7485076" h="0">
                   <a:moveTo>
                     <a:pt x="0" y="0"/>
                   </a:moveTo>
                   <a:lnTo>
-                    <a:pt x="7644336" y="0"/>
-                  </a:lnTo>
-                  <a:lnTo>
-                    <a:pt x="7644336" y="0"/>
+                    <a:pt x="7485076" y="0"/>
+                  </a:lnTo>
+                  <a:lnTo>
+                    <a:pt x="7485076" y="0"/>
                   </a:lnTo>
                 </a:path>
               </a:pathLst>
             </a:custGeom>
-            <a:ln w="13550" cap="flat">
+            <a:ln w="17246" cap="flat">
               <a:solidFill>
                 <a:srgbClr val="EBEBEB">
                   <a:alpha val="100000"/>
@@ -2658,26 +2658,26 @@
           </p:nvSpPr>
           <p:spPr>
             <a:xfrm>
-              <a:off x="972874" y="3503923"/>
-              <a:ext cx="7644336" cy="0"/>
+              <a:off x="1113155" y="3612798"/>
+              <a:ext cx="7485076" cy="0"/>
             </a:xfrm>
             <a:custGeom>
               <a:avLst/>
               <a:pathLst>
-                <a:path w="7644336" h="0">
+                <a:path w="7485076" h="0">
                   <a:moveTo>
                     <a:pt x="0" y="0"/>
                   </a:moveTo>
                   <a:lnTo>
-                    <a:pt x="7644336" y="0"/>
-                  </a:lnTo>
-                  <a:lnTo>
-                    <a:pt x="7644336" y="0"/>
+                    <a:pt x="7485076" y="0"/>
+                  </a:lnTo>
+                  <a:lnTo>
+                    <a:pt x="7485076" y="0"/>
                   </a:lnTo>
                 </a:path>
               </a:pathLst>
             </a:custGeom>
-            <a:ln w="13550" cap="flat">
+            <a:ln w="17246" cap="flat">
               <a:solidFill>
                 <a:srgbClr val="EBEBEB">
                   <a:alpha val="100000"/>
@@ -2701,15 +2701,15 @@
           </p:nvSpPr>
           <p:spPr>
             <a:xfrm>
-              <a:off x="2313115" y="2583293"/>
-              <a:ext cx="0" cy="3139848"/>
+              <a:off x="2425474" y="2782896"/>
+              <a:ext cx="0" cy="2830414"/>
             </a:xfrm>
             <a:custGeom>
               <a:avLst/>
               <a:pathLst>
-                <a:path w="0" h="3139848">
+                <a:path w="0" h="2830414">
                   <a:moveTo>
-                    <a:pt x="0" y="3139848"/>
+                    <a:pt x="0" y="2830414"/>
                   </a:moveTo>
                   <a:lnTo>
                     <a:pt x="0" y="0"/>
@@ -2720,7 +2720,7 @@
                 </a:path>
               </a:pathLst>
             </a:custGeom>
-            <a:ln w="13550" cap="flat">
+            <a:ln w="17246" cap="flat">
               <a:solidFill>
                 <a:srgbClr val="EBEBEB">
                   <a:alpha val="100000"/>
@@ -2744,15 +2744,15 @@
           </p:nvSpPr>
           <p:spPr>
             <a:xfrm>
-              <a:off x="4298657" y="2583293"/>
-              <a:ext cx="0" cy="3139848"/>
+              <a:off x="4369649" y="2782896"/>
+              <a:ext cx="0" cy="2830414"/>
             </a:xfrm>
             <a:custGeom>
               <a:avLst/>
               <a:pathLst>
-                <a:path w="0" h="3139848">
+                <a:path w="0" h="2830414">
                   <a:moveTo>
-                    <a:pt x="0" y="3139848"/>
+                    <a:pt x="0" y="2830414"/>
                   </a:moveTo>
                   <a:lnTo>
                     <a:pt x="0" y="0"/>
@@ -2763,7 +2763,7 @@
                 </a:path>
               </a:pathLst>
             </a:custGeom>
-            <a:ln w="13550" cap="flat">
+            <a:ln w="17246" cap="flat">
               <a:solidFill>
                 <a:srgbClr val="EBEBEB">
                   <a:alpha val="100000"/>
@@ -2787,15 +2787,15 @@
           </p:nvSpPr>
           <p:spPr>
             <a:xfrm>
-              <a:off x="6284199" y="2583293"/>
-              <a:ext cx="0" cy="3139848"/>
+              <a:off x="6313825" y="2782896"/>
+              <a:ext cx="0" cy="2830414"/>
             </a:xfrm>
             <a:custGeom>
               <a:avLst/>
               <a:pathLst>
-                <a:path w="0" h="3139848">
+                <a:path w="0" h="2830414">
                   <a:moveTo>
-                    <a:pt x="0" y="3139848"/>
+                    <a:pt x="0" y="2830414"/>
                   </a:moveTo>
                   <a:lnTo>
                     <a:pt x="0" y="0"/>
@@ -2806,7 +2806,7 @@
                 </a:path>
               </a:pathLst>
             </a:custGeom>
-            <a:ln w="13550" cap="flat">
+            <a:ln w="17246" cap="flat">
               <a:solidFill>
                 <a:srgbClr val="EBEBEB">
                   <a:alpha val="100000"/>
@@ -2830,15 +2830,15 @@
           </p:nvSpPr>
           <p:spPr>
             <a:xfrm>
-              <a:off x="8269741" y="2583293"/>
-              <a:ext cx="0" cy="3139848"/>
+              <a:off x="8258001" y="2782896"/>
+              <a:ext cx="0" cy="2830414"/>
             </a:xfrm>
             <a:custGeom>
               <a:avLst/>
               <a:pathLst>
-                <a:path w="0" h="3139848">
+                <a:path w="0" h="2830414">
                   <a:moveTo>
-                    <a:pt x="0" y="3139848"/>
+                    <a:pt x="0" y="2830414"/>
                   </a:moveTo>
                   <a:lnTo>
                     <a:pt x="0" y="0"/>
@@ -2849,7 +2849,7 @@
                 </a:path>
               </a:pathLst>
             </a:custGeom>
-            <a:ln w="13550" cap="flat">
+            <a:ln w="17246" cap="flat">
               <a:solidFill>
                 <a:srgbClr val="EBEBEB">
                   <a:alpha val="100000"/>
@@ -2873,69 +2873,69 @@
           </p:nvSpPr>
           <p:spPr>
             <a:xfrm>
-              <a:off x="1320344" y="3256117"/>
-              <a:ext cx="6949396" cy="2171564"/>
+              <a:off x="1453386" y="3389412"/>
+              <a:ext cx="6804615" cy="1957555"/>
             </a:xfrm>
             <a:custGeom>
               <a:avLst/>
               <a:pathLst>
-                <a:path w="6949396" h="2171564">
+                <a:path w="6804615" h="1957555">
                   <a:moveTo>
-                    <a:pt x="0" y="2171564"/>
+                    <a:pt x="0" y="1957555"/>
                   </a:moveTo>
                   <a:lnTo>
-                    <a:pt x="99277" y="2171564"/>
-                  </a:lnTo>
-                  <a:lnTo>
-                    <a:pt x="99277" y="1723778"/>
-                  </a:lnTo>
-                  <a:lnTo>
-                    <a:pt x="397108" y="1723778"/>
-                  </a:lnTo>
-                  <a:lnTo>
-                    <a:pt x="397108" y="1366190"/>
-                  </a:lnTo>
-                  <a:lnTo>
-                    <a:pt x="1489156" y="1366190"/>
-                  </a:lnTo>
-                  <a:lnTo>
-                    <a:pt x="1489156" y="1189604"/>
-                  </a:lnTo>
-                  <a:lnTo>
-                    <a:pt x="1985541" y="1189604"/>
-                  </a:lnTo>
-                  <a:lnTo>
-                    <a:pt x="1985541" y="1013944"/>
-                  </a:lnTo>
-                  <a:lnTo>
-                    <a:pt x="2283373" y="1013944"/>
-                  </a:lnTo>
-                  <a:lnTo>
-                    <a:pt x="2283373" y="842742"/>
-                  </a:lnTo>
-                  <a:lnTo>
-                    <a:pt x="3176867" y="842742"/>
-                  </a:lnTo>
-                  <a:lnTo>
-                    <a:pt x="3176867" y="488564"/>
-                  </a:lnTo>
-                  <a:lnTo>
-                    <a:pt x="3474698" y="488564"/>
-                  </a:lnTo>
-                  <a:lnTo>
-                    <a:pt x="3474698" y="318992"/>
-                  </a:lnTo>
-                  <a:lnTo>
-                    <a:pt x="6651565" y="318992"/>
-                  </a:lnTo>
-                  <a:lnTo>
-                    <a:pt x="6651565" y="156327"/>
-                  </a:lnTo>
-                  <a:lnTo>
-                    <a:pt x="6949396" y="156327"/>
-                  </a:lnTo>
-                  <a:lnTo>
-                    <a:pt x="6949396" y="0"/>
+                    <a:pt x="97208" y="1957555"/>
+                  </a:lnTo>
+                  <a:lnTo>
+                    <a:pt x="97208" y="1553899"/>
+                  </a:lnTo>
+                  <a:lnTo>
+                    <a:pt x="388835" y="1553899"/>
+                  </a:lnTo>
+                  <a:lnTo>
+                    <a:pt x="388835" y="1231551"/>
+                  </a:lnTo>
+                  <a:lnTo>
+                    <a:pt x="1458131" y="1231551"/>
+                  </a:lnTo>
+                  <a:lnTo>
+                    <a:pt x="1458131" y="1072368"/>
+                  </a:lnTo>
+                  <a:lnTo>
+                    <a:pt x="1944175" y="1072368"/>
+                  </a:lnTo>
+                  <a:lnTo>
+                    <a:pt x="1944175" y="914019"/>
+                  </a:lnTo>
+                  <a:lnTo>
+                    <a:pt x="2235802" y="914019"/>
+                  </a:lnTo>
+                  <a:lnTo>
+                    <a:pt x="2235802" y="759689"/>
+                  </a:lnTo>
+                  <a:lnTo>
+                    <a:pt x="3110681" y="759689"/>
+                  </a:lnTo>
+                  <a:lnTo>
+                    <a:pt x="3110681" y="440416"/>
+                  </a:lnTo>
+                  <a:lnTo>
+                    <a:pt x="3402307" y="440416"/>
+                  </a:lnTo>
+                  <a:lnTo>
+                    <a:pt x="3402307" y="287555"/>
+                  </a:lnTo>
+                  <a:lnTo>
+                    <a:pt x="6512988" y="287555"/>
+                  </a:lnTo>
+                  <a:lnTo>
+                    <a:pt x="6512988" y="140921"/>
+                  </a:lnTo>
+                  <a:lnTo>
+                    <a:pt x="6804615" y="140921"/>
+                  </a:lnTo>
+                  <a:lnTo>
+                    <a:pt x="6804615" y="0"/>
                   </a:lnTo>
                 </a:path>
               </a:pathLst>
@@ -2964,69 +2964,69 @@
           </p:nvSpPr>
           <p:spPr>
             <a:xfrm>
-              <a:off x="1320344" y="2861938"/>
-              <a:ext cx="6949396" cy="2529898"/>
+              <a:off x="1453386" y="3034080"/>
+              <a:ext cx="6804615" cy="2280575"/>
             </a:xfrm>
             <a:custGeom>
               <a:avLst/>
               <a:pathLst>
-                <a:path w="6949396" h="2529898">
+                <a:path w="6804615" h="2280575">
                   <a:moveTo>
-                    <a:pt x="0" y="2529898"/>
+                    <a:pt x="0" y="2280575"/>
                   </a:moveTo>
                   <a:lnTo>
-                    <a:pt x="99277" y="2529898"/>
-                  </a:lnTo>
-                  <a:lnTo>
-                    <a:pt x="99277" y="1987412"/>
-                  </a:lnTo>
-                  <a:lnTo>
-                    <a:pt x="397108" y="1987412"/>
-                  </a:lnTo>
-                  <a:lnTo>
-                    <a:pt x="397108" y="1563824"/>
-                  </a:lnTo>
-                  <a:lnTo>
-                    <a:pt x="1489156" y="1563824"/>
-                  </a:lnTo>
-                  <a:lnTo>
-                    <a:pt x="1489156" y="1357315"/>
-                  </a:lnTo>
-                  <a:lnTo>
-                    <a:pt x="1985541" y="1357315"/>
-                  </a:lnTo>
-                  <a:lnTo>
-                    <a:pt x="1985541" y="1153427"/>
-                  </a:lnTo>
-                  <a:lnTo>
-                    <a:pt x="2283373" y="1153427"/>
-                  </a:lnTo>
-                  <a:lnTo>
-                    <a:pt x="2283373" y="956053"/>
-                  </a:lnTo>
-                  <a:lnTo>
-                    <a:pt x="3176867" y="956053"/>
-                  </a:lnTo>
-                  <a:lnTo>
-                    <a:pt x="3176867" y="551413"/>
-                  </a:lnTo>
-                  <a:lnTo>
-                    <a:pt x="3474698" y="551413"/>
-                  </a:lnTo>
-                  <a:lnTo>
-                    <a:pt x="3474698" y="359223"/>
-                  </a:lnTo>
-                  <a:lnTo>
-                    <a:pt x="6651565" y="359223"/>
-                  </a:lnTo>
-                  <a:lnTo>
-                    <a:pt x="6651565" y="175687"/>
-                  </a:lnTo>
-                  <a:lnTo>
-                    <a:pt x="6949396" y="175687"/>
-                  </a:lnTo>
-                  <a:lnTo>
-                    <a:pt x="6949396" y="0"/>
+                    <a:pt x="97208" y="2280575"/>
+                  </a:lnTo>
+                  <a:lnTo>
+                    <a:pt x="97208" y="1791551"/>
+                  </a:lnTo>
+                  <a:lnTo>
+                    <a:pt x="388835" y="1791551"/>
+                  </a:lnTo>
+                  <a:lnTo>
+                    <a:pt x="388835" y="1409708"/>
+                  </a:lnTo>
+                  <a:lnTo>
+                    <a:pt x="1458131" y="1409708"/>
+                  </a:lnTo>
+                  <a:lnTo>
+                    <a:pt x="1458131" y="1223550"/>
+                  </a:lnTo>
+                  <a:lnTo>
+                    <a:pt x="1944175" y="1223550"/>
+                  </a:lnTo>
+                  <a:lnTo>
+                    <a:pt x="1944175" y="1039756"/>
+                  </a:lnTo>
+                  <a:lnTo>
+                    <a:pt x="2235802" y="1039756"/>
+                  </a:lnTo>
+                  <a:lnTo>
+                    <a:pt x="2235802" y="861833"/>
+                  </a:lnTo>
+                  <a:lnTo>
+                    <a:pt x="3110681" y="861833"/>
+                  </a:lnTo>
+                  <a:lnTo>
+                    <a:pt x="3110681" y="497071"/>
+                  </a:lnTo>
+                  <a:lnTo>
+                    <a:pt x="3402307" y="497071"/>
+                  </a:lnTo>
+                  <a:lnTo>
+                    <a:pt x="3402307" y="323821"/>
+                  </a:lnTo>
+                  <a:lnTo>
+                    <a:pt x="6512988" y="323821"/>
+                  </a:lnTo>
+                  <a:lnTo>
+                    <a:pt x="6512988" y="158373"/>
+                  </a:lnTo>
+                  <a:lnTo>
+                    <a:pt x="6804615" y="158373"/>
+                  </a:lnTo>
+                  <a:lnTo>
+                    <a:pt x="6804615" y="0"/>
                   </a:lnTo>
                 </a:path>
               </a:pathLst>
@@ -3055,8 +3055,8 @@
           </p:nvSpPr>
           <p:spPr>
             <a:xfrm>
-              <a:off x="692708" y="5540371"/>
-              <a:ext cx="217535" cy="80101"/>
+              <a:off x="756929" y="5433678"/>
+              <a:ext cx="276514" cy="101955"/>
             </a:xfrm>
             <a:prstGeom prst="rect">
               <a:avLst/>
@@ -3069,7 +3069,7 @@
             <a:p>
               <a:pPr algn="l" marL="0" marR="0" indent="0">
                 <a:lnSpc>
-                  <a:spcPts val="880"/>
+                  <a:spcPts val="1120"/>
                 </a:lnSpc>
                 <a:spcBef>
                   <a:spcPts val="0"/>
@@ -3079,7 +3079,7 @@
                 </a:spcAft>
               </a:pPr>
               <a:r>
-                <a:rPr sz="880">
+                <a:rPr sz="1120">
                   <a:solidFill>
                     <a:srgbClr val="4D4D4D">
                       <a:alpha val="100000"/>
@@ -3101,8 +3101,8 @@
           </p:nvSpPr>
           <p:spPr>
             <a:xfrm>
-              <a:off x="692708" y="4502122"/>
-              <a:ext cx="217535" cy="80101"/>
+              <a:off x="756929" y="4497749"/>
+              <a:ext cx="276514" cy="101955"/>
             </a:xfrm>
             <a:prstGeom prst="rect">
               <a:avLst/>
@@ -3115,7 +3115,7 @@
             <a:p>
               <a:pPr algn="l" marL="0" marR="0" indent="0">
                 <a:lnSpc>
-                  <a:spcPts val="880"/>
+                  <a:spcPts val="1120"/>
                 </a:lnSpc>
                 <a:spcBef>
                   <a:spcPts val="0"/>
@@ -3125,7 +3125,7 @@
                 </a:spcAft>
               </a:pPr>
               <a:r>
-                <a:rPr sz="880">
+                <a:rPr sz="1120">
                   <a:solidFill>
                     <a:srgbClr val="4D4D4D">
                       <a:alpha val="100000"/>
@@ -3147,8 +3147,8 @@
           </p:nvSpPr>
           <p:spPr>
             <a:xfrm>
-              <a:off x="692708" y="3463873"/>
-              <a:ext cx="217535" cy="80101"/>
+              <a:off x="756929" y="3561820"/>
+              <a:ext cx="276514" cy="101955"/>
             </a:xfrm>
             <a:prstGeom prst="rect">
               <a:avLst/>
@@ -3161,7 +3161,7 @@
             <a:p>
               <a:pPr algn="l" marL="0" marR="0" indent="0">
                 <a:lnSpc>
-                  <a:spcPts val="880"/>
+                  <a:spcPts val="1120"/>
                 </a:lnSpc>
                 <a:spcBef>
                   <a:spcPts val="0"/>
@@ -3171,7 +3171,7 @@
                 </a:spcAft>
               </a:pPr>
               <a:r>
-                <a:rPr sz="880">
+                <a:rPr sz="1120">
                   <a:solidFill>
                     <a:srgbClr val="4D4D4D">
                       <a:alpha val="100000"/>
@@ -3193,8 +3193,8 @@
           </p:nvSpPr>
           <p:spPr>
             <a:xfrm>
-              <a:off x="2250936" y="5785772"/>
-              <a:ext cx="124358" cy="80101"/>
+              <a:off x="2346469" y="5693022"/>
+              <a:ext cx="158008" cy="101955"/>
             </a:xfrm>
             <a:prstGeom prst="rect">
               <a:avLst/>
@@ -3207,7 +3207,7 @@
             <a:p>
               <a:pPr algn="l" marL="0" marR="0" indent="0">
                 <a:lnSpc>
-                  <a:spcPts val="880"/>
+                  <a:spcPts val="1120"/>
                 </a:lnSpc>
                 <a:spcBef>
                   <a:spcPts val="0"/>
@@ -3217,7 +3217,7 @@
                 </a:spcAft>
               </a:pPr>
               <a:r>
-                <a:rPr sz="880">
+                <a:rPr sz="1120">
                   <a:solidFill>
                     <a:srgbClr val="4D4D4D">
                       <a:alpha val="100000"/>
@@ -3239,8 +3239,8 @@
           </p:nvSpPr>
           <p:spPr>
             <a:xfrm>
-              <a:off x="4236477" y="5785772"/>
-              <a:ext cx="124358" cy="80101"/>
+              <a:off x="4290645" y="5693022"/>
+              <a:ext cx="158008" cy="101955"/>
             </a:xfrm>
             <a:prstGeom prst="rect">
               <a:avLst/>
@@ -3253,7 +3253,7 @@
             <a:p>
               <a:pPr algn="l" marL="0" marR="0" indent="0">
                 <a:lnSpc>
-                  <a:spcPts val="880"/>
+                  <a:spcPts val="1120"/>
                 </a:lnSpc>
                 <a:spcBef>
                   <a:spcPts val="0"/>
@@ -3263,7 +3263,7 @@
                 </a:spcAft>
               </a:pPr>
               <a:r>
-                <a:rPr sz="880">
+                <a:rPr sz="1120">
                   <a:solidFill>
                     <a:srgbClr val="4D4D4D">
                       <a:alpha val="100000"/>
@@ -3285,8 +3285,8 @@
           </p:nvSpPr>
           <p:spPr>
             <a:xfrm>
-              <a:off x="6222019" y="5785772"/>
-              <a:ext cx="124358" cy="80101"/>
+              <a:off x="6234821" y="5693022"/>
+              <a:ext cx="158008" cy="101955"/>
             </a:xfrm>
             <a:prstGeom prst="rect">
               <a:avLst/>
@@ -3299,7 +3299,7 @@
             <a:p>
               <a:pPr algn="l" marL="0" marR="0" indent="0">
                 <a:lnSpc>
-                  <a:spcPts val="880"/>
+                  <a:spcPts val="1120"/>
                 </a:lnSpc>
                 <a:spcBef>
                   <a:spcPts val="0"/>
@@ -3309,7 +3309,7 @@
                 </a:spcAft>
               </a:pPr>
               <a:r>
-                <a:rPr sz="880">
+                <a:rPr sz="1120">
                   <a:solidFill>
                     <a:srgbClr val="4D4D4D">
                       <a:alpha val="100000"/>
@@ -3331,8 +3331,8 @@
           </p:nvSpPr>
           <p:spPr>
             <a:xfrm>
-              <a:off x="8207561" y="5785772"/>
-              <a:ext cx="124358" cy="80101"/>
+              <a:off x="8178997" y="5693022"/>
+              <a:ext cx="158008" cy="101955"/>
             </a:xfrm>
             <a:prstGeom prst="rect">
               <a:avLst/>
@@ -3345,7 +3345,7 @@
             <a:p>
               <a:pPr algn="l" marL="0" marR="0" indent="0">
                 <a:lnSpc>
-                  <a:spcPts val="880"/>
+                  <a:spcPts val="1120"/>
                 </a:lnSpc>
                 <a:spcBef>
                   <a:spcPts val="0"/>
@@ -3355,7 +3355,7 @@
                 </a:spcAft>
               </a:pPr>
               <a:r>
-                <a:rPr sz="880">
+                <a:rPr sz="1120">
                   <a:solidFill>
                     <a:srgbClr val="4D4D4D">
                       <a:alpha val="100000"/>
@@ -3377,8 +3377,8 @@
           </p:nvSpPr>
           <p:spPr>
             <a:xfrm>
-              <a:off x="4197162" y="5925448"/>
-              <a:ext cx="1195760" cy="100218"/>
+              <a:off x="4094958" y="5870717"/>
+              <a:ext cx="1521470" cy="127558"/>
             </a:xfrm>
             <a:prstGeom prst="rect">
               <a:avLst/>
@@ -3391,7 +3391,7 @@
             <a:p>
               <a:pPr algn="l" marL="0" marR="0" indent="0">
                 <a:lnSpc>
-                  <a:spcPts val="1100"/>
+                  <a:spcPts val="1400"/>
                 </a:lnSpc>
                 <a:spcBef>
                   <a:spcPts val="0"/>
@@ -3401,7 +3401,7 @@
                 </a:spcAft>
               </a:pPr>
               <a:r>
-                <a:rPr sz="1100">
+                <a:rPr sz="1400">
                   <a:solidFill>
                     <a:srgbClr val="000000">
                       <a:alpha val="100000"/>
@@ -3423,8 +3423,8 @@
           </p:nvSpPr>
           <p:spPr>
             <a:xfrm rot="-5400000">
-              <a:off x="-87047" y="4103109"/>
-              <a:ext cx="1327891" cy="100218"/>
+              <a:off x="-235221" y="4134324"/>
+              <a:ext cx="1689536" cy="127558"/>
             </a:xfrm>
             <a:prstGeom prst="rect">
               <a:avLst/>
@@ -3437,7 +3437,7 @@
             <a:p>
               <a:pPr algn="l" marL="0" marR="0" indent="0">
                 <a:lnSpc>
-                  <a:spcPts val="1100"/>
+                  <a:spcPts val="1400"/>
                 </a:lnSpc>
                 <a:spcBef>
                   <a:spcPts val="0"/>
@@ -3447,7 +3447,7 @@
                 </a:spcAft>
               </a:pPr>
               <a:r>
-                <a:rPr sz="1100">
+                <a:rPr sz="1400">
                   <a:solidFill>
                     <a:srgbClr val="000000">
                       <a:alpha val="100000"/>
@@ -3469,7 +3469,7 @@
           </p:nvSpPr>
           <p:spPr>
             <a:xfrm>
-              <a:off x="3578565" y="2264798"/>
+              <a:off x="3362626" y="2407465"/>
               <a:ext cx="175564" cy="0"/>
             </a:xfrm>
             <a:custGeom>
@@ -3509,7 +3509,7 @@
           </p:nvSpPr>
           <p:spPr>
             <a:xfrm>
-              <a:off x="4819138" y="2264798"/>
+              <a:off x="4880455" y="2407465"/>
               <a:ext cx="175564" cy="0"/>
             </a:xfrm>
             <a:custGeom>
@@ -3549,8 +3549,8 @@
           </p:nvSpPr>
           <p:spPr>
             <a:xfrm>
-              <a:off x="3845665" y="2224748"/>
-              <a:ext cx="881938" cy="80101"/>
+              <a:off x="3648704" y="2356487"/>
+              <a:ext cx="1121237" cy="101955"/>
             </a:xfrm>
             <a:prstGeom prst="rect">
               <a:avLst/>
@@ -3563,7 +3563,7 @@
             <a:p>
               <a:pPr algn="l" marL="0" marR="0" indent="0">
                 <a:lnSpc>
-                  <a:spcPts val="880"/>
+                  <a:spcPts val="1120"/>
                 </a:lnSpc>
                 <a:spcBef>
                   <a:spcPts val="0"/>
@@ -3573,7 +3573,7 @@
                 </a:spcAft>
               </a:pPr>
               <a:r>
-                <a:rPr sz="880">
+                <a:rPr sz="1120">
                   <a:solidFill>
                     <a:srgbClr val="000000">
                       <a:alpha val="100000"/>
@@ -3595,8 +3595,8 @@
           </p:nvSpPr>
           <p:spPr>
             <a:xfrm>
-              <a:off x="5086238" y="2224748"/>
-              <a:ext cx="947226" cy="80101"/>
+              <a:off x="5166533" y="2356487"/>
+              <a:ext cx="1204173" cy="101955"/>
             </a:xfrm>
             <a:prstGeom prst="rect">
               <a:avLst/>
@@ -3609,7 +3609,7 @@
             <a:p>
               <a:pPr algn="l" marL="0" marR="0" indent="0">
                 <a:lnSpc>
-                  <a:spcPts val="880"/>
+                  <a:spcPts val="1120"/>
                 </a:lnSpc>
                 <a:spcBef>
                   <a:spcPts val="0"/>
@@ -3619,7 +3619,7 @@
                 </a:spcAft>
               </a:pPr>
               <a:r>
-                <a:rPr sz="880">
+                <a:rPr sz="1120">
                   <a:solidFill>
                     <a:srgbClr val="000000">
                       <a:alpha val="100000"/>
@@ -3641,8 +3641,8 @@
           </p:nvSpPr>
           <p:spPr>
             <a:xfrm>
-              <a:off x="972874" y="1896563"/>
-              <a:ext cx="3913906" cy="91165"/>
+              <a:off x="1113155" y="1977589"/>
+              <a:ext cx="4697455" cy="109362"/>
             </a:xfrm>
             <a:prstGeom prst="rect">
               <a:avLst/>
@@ -3655,7 +3655,7 @@
             <a:p>
               <a:pPr algn="l" marL="0" marR="0" indent="0">
                 <a:lnSpc>
-                  <a:spcPts val="1000"/>
+                  <a:spcPts val="1200"/>
                 </a:lnSpc>
                 <a:spcBef>
                   <a:spcPts val="0"/>
@@ -3665,7 +3665,7 @@
                 </a:spcAft>
               </a:pPr>
               <a:r>
-                <a:rPr sz="1000">
+                <a:rPr sz="1200">
                   <a:solidFill>
                     <a:srgbClr val="404040">
                       <a:alpha val="100000"/>
@@ -3687,8 +3687,8 @@
           </p:nvSpPr>
           <p:spPr>
             <a:xfrm>
-              <a:off x="972874" y="1669789"/>
-              <a:ext cx="1219901" cy="120152"/>
+              <a:off x="1113155" y="1688767"/>
+              <a:ext cx="1553016" cy="153070"/>
             </a:xfrm>
             <a:prstGeom prst="rect">
               <a:avLst/>
@@ -3701,7 +3701,7 @@
             <a:p>
               <a:pPr algn="l" marL="0" marR="0" indent="0">
                 <a:lnSpc>
-                  <a:spcPts val="1320"/>
+                  <a:spcPts val="1680"/>
                 </a:lnSpc>
                 <a:spcBef>
                   <a:spcPts val="0"/>
@@ -3711,7 +3711,7 @@
                 </a:spcAft>
               </a:pPr>
               <a:r>
-                <a:rPr sz="1320">
+                <a:rPr sz="1680">
                   <a:solidFill>
                     <a:srgbClr val="000000">
                       <a:alpha val="100000"/>
